--- a/dist/초4/과학/땅과밤하늘/초4_과학_땅과밤하늘_02_달의모양변화.pptx
+++ b/dist/초4/과학/땅과밤하늘/초4_과학_땅과밤하늘_02_달의모양변화.pptx
@@ -122,20 +122,20 @@
   <p:extLst>
     <p:ext uri="{521415D9-36F7-43E2-AB2F-B90AF26B5E84}">
       <p14:sectionLst xmlns:p14="http://schemas.microsoft.com/office/powerpoint/2010/main">
-        <p14:section name="도입" id="{38ea9212-3ae5-6959-4416-fe1ccaeb12f2}">
+        <p14:section name="도입" id="{879e5bb1-24d4-9900-ab1f-e100425ccf23}">
           <p14:sldIdLst>
             <p14:sldId id="256"/>
             <p14:sldId id="257"/>
           </p14:sldIdLst>
         </p14:section>
-        <p14:section name="개념" id="{b0ce876d-4348-f86a-8edb-21822556ae85}">
+        <p14:section name="개념" id="{edc888a0-0a61-8913-47b8-670bdf2d9518}">
           <p14:sldIdLst>
             <p14:sldId id="258"/>
             <p14:sldId id="262"/>
             <p14:sldId id="264"/>
           </p14:sldIdLst>
         </p14:section>
-        <p14:section name="연습" id="{35c1cbd8-e546-5f42-1154-a8de6d3eb4df}">
+        <p14:section name="연습" id="{f8effac6-410a-b62b-4162-ba951730d4f6}">
           <p14:sldIdLst>
             <p14:sldId id="259"/>
             <p14:sldId id="260"/>
@@ -145,31 +145,31 @@
             <p14:sldId id="266"/>
           </p14:sldIdLst>
         </p14:section>
-        <p14:section name="개념" id="{f671a8c4-9606-7e60-9542-801b5b7f90bf}">
+        <p14:section name="개념" id="{b20e53eb-21e3-ffea-1aa9-a3b420c9cb94}">
           <p14:sldIdLst/>
         </p14:section>
-        <p14:section name="연습" id="{04bcdfeb-4542-23ab-0bbc-95031e0199ea}">
+        <p14:section name="연습" id="{93a6bfc6-6d60-847f-a648-db9eb4aaee28}">
           <p14:sldIdLst/>
         </p14:section>
-        <p14:section name="개념" id="{88183c6c-636a-8e92-4d75-53a3d83e5974}">
+        <p14:section name="개념" id="{61eeeee1-5e3b-0d0e-02f0-eabe26f0eb46}">
           <p14:sldIdLst/>
         </p14:section>
-        <p14:section name="연습" id="{119cff9b-0888-0038-a436-951fb5eb98c7}">
+        <p14:section name="연습" id="{c8405710-fbc5-d8f9-6bb1-31121969dfc9}">
           <p14:sldIdLst/>
         </p14:section>
-        <p14:section name="확인" id="{352ee879-4633-5296-a9c3-776bb3e1429f}">
+        <p14:section name="확인" id="{21207875-7974-9d21-57ec-e7cec1e875f6}">
           <p14:sldIdLst>
             <p14:sldId id="267"/>
             <p14:sldId id="268"/>
             <p14:sldId id="269"/>
           </p14:sldIdLst>
         </p14:section>
-        <p14:section name="정리" id="{9e11512e-b480-3a60-85c9-dded27449199}">
+        <p14:section name="정리" id="{9c09921f-09b7-4ea6-9e9c-d25034fb71fa}">
           <p14:sldIdLst>
             <p14:sldId id="270"/>
           </p14:sldIdLst>
         </p14:section>
-        <p14:section name="보충" id="{7d2ad9f2-3585-990a-257e-53296504d5de}">
+        <p14:section name="보충" id="{662d5a4d-b9fa-9667-e57b-d3051c86b5c6}">
           <p14:sldIdLst>
             <p14:sldId id="271"/>
           </p14:sldIdLst>
@@ -686,13 +686,13 @@
 - “④는 밝은 쪽이 오른쪽이야, 왼쪽이야? 굵어, 가늘어?”
 정답
 - ① 동쪽 하늘에 보름달(또는 보름달에 가까운 둥근 달)
-- ② 남쪽(동쪽으로) 쪽으로 옮겨 가고, 모양은 상현달에 가까워진다
+- ② 남쪽 하늘에 상현달(또는 상현달에 가까운 달)
 - ③ 상현달
 - ④ 그믐달(왼쪽이 가늘게 밝음)
 막히면
 - ①②는 S09 그림, ③④는 S03·S07 그림을 다시 보여 줍니다.
 주의
-- ①은 음력 7일 무렵 상현달에서 8일 뒤면 음력 15일 무렵이라는 뜻입니다. ‘보름달에 가까운 둥근 달’이라고 해도 맞습니다.</a:t>
+- ①은 음력 7일 무렵 상현달에서 8일 뒤면 음력 15일 무렵, ②는 음력 3일 무렵 초승달에서 4일 뒤면 음력 7일 무렵이라는 뜻입니다(예시 기록과 같습니다). ‘보름달에 가까운 둥근 달’, ‘남쪽 가까이’처럼 말해도 맞습니다.</a:t>
             </a:r>
             <a:endParaRPr lang="en-US" dirty="0"/>
           </a:p>
@@ -3436,73 +3436,73 @@
                   <a:pt x="0" y="0"/>
                 </a:lnTo>
                 <a:lnTo>
-                  <a:pt x="57432" y="7179"/>
-                </a:lnTo>
-                <a:lnTo>
-                  <a:pt x="113269" y="27121"/>
-                </a:lnTo>
-                <a:lnTo>
-                  <a:pt x="167510" y="60623"/>
-                </a:lnTo>
-                <a:lnTo>
-                  <a:pt x="219359" y="106888"/>
-                </a:lnTo>
-                <a:lnTo>
-                  <a:pt x="267219" y="165117"/>
-                </a:lnTo>
-                <a:lnTo>
-                  <a:pt x="310293" y="233717"/>
-                </a:lnTo>
-                <a:lnTo>
-                  <a:pt x="347783" y="311888"/>
-                </a:lnTo>
-                <a:lnTo>
-                  <a:pt x="379690" y="398834"/>
-                </a:lnTo>
-                <a:lnTo>
-                  <a:pt x="405215" y="492161"/>
-                </a:lnTo>
-                <a:lnTo>
-                  <a:pt x="423562" y="591072"/>
-                </a:lnTo>
-                <a:lnTo>
-                  <a:pt x="434729" y="693174"/>
-                </a:lnTo>
-                <a:lnTo>
-                  <a:pt x="438717" y="797668"/>
-                </a:lnTo>
-                <a:lnTo>
-                  <a:pt x="434729" y="902163"/>
-                </a:lnTo>
-                <a:lnTo>
-                  <a:pt x="423562" y="1004264"/>
-                </a:lnTo>
-                <a:lnTo>
-                  <a:pt x="405215" y="1103175"/>
-                </a:lnTo>
-                <a:lnTo>
-                  <a:pt x="379690" y="1196502"/>
-                </a:lnTo>
-                <a:lnTo>
-                  <a:pt x="347783" y="1283448"/>
-                </a:lnTo>
-                <a:lnTo>
-                  <a:pt x="310293" y="1361619"/>
-                </a:lnTo>
-                <a:lnTo>
-                  <a:pt x="267219" y="1430219"/>
-                </a:lnTo>
-                <a:lnTo>
-                  <a:pt x="219359" y="1488449"/>
-                </a:lnTo>
-                <a:lnTo>
-                  <a:pt x="167510" y="1534713"/>
-                </a:lnTo>
-                <a:lnTo>
-                  <a:pt x="113269" y="1568215"/>
-                </a:lnTo>
-                <a:lnTo>
-                  <a:pt x="57432" y="1588157"/>
+                  <a:pt x="67802" y="7179"/>
+                </a:lnTo>
+                <a:lnTo>
+                  <a:pt x="134008" y="27121"/>
+                </a:lnTo>
+                <a:lnTo>
+                  <a:pt x="198619" y="60623"/>
+                </a:lnTo>
+                <a:lnTo>
+                  <a:pt x="259242" y="106888"/>
+                </a:lnTo>
+                <a:lnTo>
+                  <a:pt x="315877" y="165117"/>
+                </a:lnTo>
+                <a:lnTo>
+                  <a:pt x="366927" y="233717"/>
+                </a:lnTo>
+                <a:lnTo>
+                  <a:pt x="411597" y="311888"/>
+                </a:lnTo>
+                <a:lnTo>
+                  <a:pt x="449087" y="398834"/>
+                </a:lnTo>
+                <a:lnTo>
+                  <a:pt x="479399" y="492161"/>
+                </a:lnTo>
+                <a:lnTo>
+                  <a:pt x="500936" y="591072"/>
+                </a:lnTo>
+                <a:lnTo>
+                  <a:pt x="513698" y="693174"/>
+                </a:lnTo>
+                <a:lnTo>
+                  <a:pt x="518484" y="797668"/>
+                </a:lnTo>
+                <a:lnTo>
+                  <a:pt x="513698" y="902163"/>
+                </a:lnTo>
+                <a:lnTo>
+                  <a:pt x="500936" y="1004264"/>
+                </a:lnTo>
+                <a:lnTo>
+                  <a:pt x="479399" y="1103175"/>
+                </a:lnTo>
+                <a:lnTo>
+                  <a:pt x="449087" y="1196502"/>
+                </a:lnTo>
+                <a:lnTo>
+                  <a:pt x="411597" y="1283448"/>
+                </a:lnTo>
+                <a:lnTo>
+                  <a:pt x="366927" y="1361619"/>
+                </a:lnTo>
+                <a:lnTo>
+                  <a:pt x="315877" y="1430219"/>
+                </a:lnTo>
+                <a:lnTo>
+                  <a:pt x="259242" y="1488449"/>
+                </a:lnTo>
+                <a:lnTo>
+                  <a:pt x="198619" y="1534713"/>
+                </a:lnTo>
+                <a:lnTo>
+                  <a:pt x="134008" y="1568215"/>
+                </a:lnTo>
+                <a:lnTo>
+                  <a:pt x="67802" y="1588157"/>
                 </a:lnTo>
                 <a:lnTo>
                   <a:pt x="0" y="1595336"/>
@@ -3740,7 +3740,7 @@
       </p:sp>
       <p:sp>
         <p:nvSpPr>
-          <p:cNvPr id="3" name="S10-card159"/>
+          <p:cNvPr id="3" name="S10-card153"/>
           <p:cNvSpPr/>
           <p:nvPr/>
         </p:nvSpPr>
@@ -3767,7 +3767,7 @@
       </p:sp>
       <p:sp>
         <p:nvSpPr>
-          <p:cNvPr id="4" name="S10-cardtext160"/>
+          <p:cNvPr id="4" name="S10-cardtext154"/>
           <p:cNvSpPr txBox="1"/>
           <p:nvPr/>
         </p:nvSpPr>
@@ -3809,7 +3809,7 @@
       </p:sp>
       <p:sp>
         <p:nvSpPr>
-          <p:cNvPr id="5" name="S10-chip161"/>
+          <p:cNvPr id="5" name="S10-chip155"/>
           <p:cNvSpPr txBox="1"/>
           <p:nvPr/>
         </p:nvSpPr>
@@ -3856,7 +3856,7 @@
       </p:sp>
       <p:sp>
         <p:nvSpPr>
-          <p:cNvPr id="6" name="S10-text162"/>
+          <p:cNvPr id="6" name="S10-text156"/>
           <p:cNvSpPr txBox="1"/>
           <p:nvPr/>
         </p:nvSpPr>
@@ -3887,7 +3887,7 @@
                 <a:ea typeface="맑은 고딕" pitchFamily="34" charset="-122"/>
                 <a:cs typeface="맑은 고딕" pitchFamily="34" charset="-120"/>
               </a:rPr>
-              <a:t>오늘 저녁 7시, 상현달이 남쪽에.</a:t>
+              <a:t>저녁 7시 남쪽에 상현달.</a:t>
             </a:r>
             <a:endParaRPr lang="ko-KR" sz="3000" dirty="0"/>
           </a:p>
@@ -3912,7 +3912,7 @@
       </p:sp>
       <p:sp>
         <p:nvSpPr>
-          <p:cNvPr id="7" name="S10-chip163"/>
+          <p:cNvPr id="7" name="S10-chip157"/>
           <p:cNvSpPr txBox="1"/>
           <p:nvPr/>
         </p:nvSpPr>
@@ -3959,7 +3959,7 @@
       </p:sp>
       <p:sp>
         <p:nvSpPr>
-          <p:cNvPr id="8" name="S10-text164"/>
+          <p:cNvPr id="8" name="S10-text158"/>
           <p:cNvSpPr txBox="1"/>
           <p:nvPr/>
         </p:nvSpPr>
@@ -3990,7 +3990,7 @@
                 <a:ea typeface="맑은 고딕" pitchFamily="34" charset="-122"/>
                 <a:cs typeface="맑은 고딕" pitchFamily="34" charset="-120"/>
               </a:rPr>
-              <a:t>오늘 저녁 서쪽에 초승달.</a:t>
+              <a:t>저녁 7시 서쪽에 초승달.</a:t>
             </a:r>
             <a:endParaRPr lang="ko-KR" sz="3000" dirty="0"/>
           </a:p>
@@ -4007,7 +4007,7 @@
                 <a:ea typeface="맑은 고딕" pitchFamily="34" charset="-122"/>
                 <a:cs typeface="맑은 고딕" pitchFamily="34" charset="-120"/>
               </a:rPr>
-              <a:t>며칠 뒤 같은 시각, 어느 쪽으로?</a:t>
+              <a:t>4일 뒤 같은 시각에는?</a:t>
             </a:r>
             <a:endParaRPr lang="ko-KR" sz="3000" dirty="0"/>
           </a:p>
@@ -4015,7 +4015,7 @@
       </p:sp>
       <p:sp>
         <p:nvSpPr>
-          <p:cNvPr id="9" name="S10-chip165"/>
+          <p:cNvPr id="9" name="S10-chip159"/>
           <p:cNvSpPr txBox="1"/>
           <p:nvPr/>
         </p:nvSpPr>
@@ -4062,7 +4062,7 @@
       </p:sp>
       <p:sp>
         <p:nvSpPr>
-          <p:cNvPr id="10" name="S10-text166"/>
+          <p:cNvPr id="10" name="S10-text160"/>
           <p:cNvSpPr txBox="1"/>
           <p:nvPr/>
         </p:nvSpPr>
@@ -4118,7 +4118,7 @@
       </p:sp>
       <p:sp>
         <p:nvSpPr>
-          <p:cNvPr id="11" name="S10-chip167"/>
+          <p:cNvPr id="11" name="S10-chip161"/>
           <p:cNvSpPr txBox="1"/>
           <p:nvPr/>
         </p:nvSpPr>
@@ -4165,7 +4165,7 @@
       </p:sp>
       <p:sp>
         <p:nvSpPr>
-          <p:cNvPr id="12" name="S10-figure168" descr="그믐달: 왼쪽이 가늘게 밝은 눈썹 모양"/>
+          <p:cNvPr id="12" name="S10-figure162" descr="그믐달: 왼쪽이 가늘게 밝은 눈썹 모양"/>
           <p:cNvSpPr/>
           <p:nvPr/>
         </p:nvSpPr>
@@ -4190,7 +4190,7 @@
       </p:sp>
       <p:sp>
         <p:nvSpPr>
-          <p:cNvPr id="13" name="S10-mark169"/>
+          <p:cNvPr id="13" name="S10-mark163"/>
           <p:cNvSpPr/>
           <p:nvPr/>
         </p:nvSpPr>
@@ -4286,73 +4286,73 @@
                   <a:pt x="811530" y="0"/>
                 </a:lnTo>
                 <a:lnTo>
-                  <a:pt x="753100" y="7304"/>
-                </a:lnTo>
-                <a:lnTo>
-                  <a:pt x="696293" y="27592"/>
-                </a:lnTo>
-                <a:lnTo>
-                  <a:pt x="641109" y="61676"/>
-                </a:lnTo>
-                <a:lnTo>
-                  <a:pt x="588359" y="108745"/>
-                </a:lnTo>
-                <a:lnTo>
-                  <a:pt x="539667" y="167987"/>
-                </a:lnTo>
-                <a:lnTo>
-                  <a:pt x="495845" y="237778"/>
-                </a:lnTo>
-                <a:lnTo>
-                  <a:pt x="457703" y="317308"/>
-                </a:lnTo>
-                <a:lnTo>
-                  <a:pt x="425242" y="405765"/>
-                </a:lnTo>
-                <a:lnTo>
-                  <a:pt x="399273" y="500714"/>
-                </a:lnTo>
-                <a:lnTo>
-                  <a:pt x="380608" y="601344"/>
-                </a:lnTo>
-                <a:lnTo>
-                  <a:pt x="369246" y="705220"/>
-                </a:lnTo>
-                <a:lnTo>
-                  <a:pt x="365188" y="811530"/>
-                </a:lnTo>
-                <a:lnTo>
-                  <a:pt x="369246" y="917840"/>
-                </a:lnTo>
-                <a:lnTo>
-                  <a:pt x="380608" y="1021716"/>
-                </a:lnTo>
-                <a:lnTo>
-                  <a:pt x="399273" y="1122346"/>
-                </a:lnTo>
-                <a:lnTo>
-                  <a:pt x="425242" y="1217295"/>
-                </a:lnTo>
-                <a:lnTo>
-                  <a:pt x="457703" y="1305752"/>
-                </a:lnTo>
-                <a:lnTo>
-                  <a:pt x="495845" y="1385282"/>
-                </a:lnTo>
-                <a:lnTo>
-                  <a:pt x="539667" y="1455073"/>
-                </a:lnTo>
-                <a:lnTo>
-                  <a:pt x="588359" y="1514315"/>
-                </a:lnTo>
-                <a:lnTo>
-                  <a:pt x="641109" y="1561384"/>
-                </a:lnTo>
-                <a:lnTo>
-                  <a:pt x="696293" y="1595468"/>
-                </a:lnTo>
-                <a:lnTo>
-                  <a:pt x="753100" y="1615756"/>
+                  <a:pt x="742550" y="7304"/>
+                </a:lnTo>
+                <a:lnTo>
+                  <a:pt x="675193" y="27592"/>
+                </a:lnTo>
+                <a:lnTo>
+                  <a:pt x="609459" y="61676"/>
+                </a:lnTo>
+                <a:lnTo>
+                  <a:pt x="547783" y="108745"/>
+                </a:lnTo>
+                <a:lnTo>
+                  <a:pt x="490164" y="167987"/>
+                </a:lnTo>
+                <a:lnTo>
+                  <a:pt x="438226" y="237778"/>
+                </a:lnTo>
+                <a:lnTo>
+                  <a:pt x="392781" y="317308"/>
+                </a:lnTo>
+                <a:lnTo>
+                  <a:pt x="354639" y="405765"/>
+                </a:lnTo>
+                <a:lnTo>
+                  <a:pt x="323800" y="500714"/>
+                </a:lnTo>
+                <a:lnTo>
+                  <a:pt x="301889" y="601344"/>
+                </a:lnTo>
+                <a:lnTo>
+                  <a:pt x="288905" y="705220"/>
+                </a:lnTo>
+                <a:lnTo>
+                  <a:pt x="284035" y="811530"/>
+                </a:lnTo>
+                <a:lnTo>
+                  <a:pt x="288905" y="917840"/>
+                </a:lnTo>
+                <a:lnTo>
+                  <a:pt x="301889" y="1021716"/>
+                </a:lnTo>
+                <a:lnTo>
+                  <a:pt x="323800" y="1122346"/>
+                </a:lnTo>
+                <a:lnTo>
+                  <a:pt x="354639" y="1217295"/>
+                </a:lnTo>
+                <a:lnTo>
+                  <a:pt x="392781" y="1305752"/>
+                </a:lnTo>
+                <a:lnTo>
+                  <a:pt x="438226" y="1385282"/>
+                </a:lnTo>
+                <a:lnTo>
+                  <a:pt x="490164" y="1455073"/>
+                </a:lnTo>
+                <a:lnTo>
+                  <a:pt x="547783" y="1514315"/>
+                </a:lnTo>
+                <a:lnTo>
+                  <a:pt x="609459" y="1561384"/>
+                </a:lnTo>
+                <a:lnTo>
+                  <a:pt x="675193" y="1595468"/>
+                </a:lnTo>
+                <a:lnTo>
+                  <a:pt x="742550" y="1615756"/>
                 </a:lnTo>
                 <a:lnTo>
                   <a:pt x="811530" y="1623060"/>
@@ -4369,7 +4369,7 @@
       </p:sp>
       <p:sp>
         <p:nvSpPr>
-          <p:cNvPr id="14" name="S10-mark170"/>
+          <p:cNvPr id="14" name="S10-mark164"/>
           <p:cNvSpPr/>
           <p:nvPr/>
         </p:nvSpPr>
@@ -4506,7 +4506,7 @@
       </p:sp>
       <p:sp>
         <p:nvSpPr>
-          <p:cNvPr id="3" name="S11-card171"/>
+          <p:cNvPr id="3" name="S11-card165"/>
           <p:cNvSpPr/>
           <p:nvPr/>
         </p:nvSpPr>
@@ -4533,7 +4533,7 @@
       </p:sp>
       <p:sp>
         <p:nvSpPr>
-          <p:cNvPr id="4" name="S11-cardtext172"/>
+          <p:cNvPr id="4" name="S11-cardtext166"/>
           <p:cNvSpPr txBox="1"/>
           <p:nvPr/>
         </p:nvSpPr>
@@ -4575,7 +4575,7 @@
       </p:sp>
       <p:sp>
         <p:nvSpPr>
-          <p:cNvPr id="5" name="S11-card173"/>
+          <p:cNvPr id="5" name="S11-card167"/>
           <p:cNvSpPr/>
           <p:nvPr/>
         </p:nvSpPr>
@@ -4602,7 +4602,7 @@
       </p:sp>
       <p:sp>
         <p:nvSpPr>
-          <p:cNvPr id="6" name="S11-cardtext174"/>
+          <p:cNvPr id="6" name="S11-cardtext168"/>
           <p:cNvSpPr txBox="1"/>
           <p:nvPr/>
         </p:nvSpPr>
@@ -4704,7 +4704,7 @@
       </p:sp>
       <p:sp>
         <p:nvSpPr>
-          <p:cNvPr id="7" name="S11-stepno175"/>
+          <p:cNvPr id="7" name="S11-stepno169"/>
           <p:cNvSpPr txBox="1"/>
           <p:nvPr/>
         </p:nvSpPr>
@@ -4749,7 +4749,7 @@
       </p:sp>
       <p:sp>
         <p:nvSpPr>
-          <p:cNvPr id="8" name="S11-text176"/>
+          <p:cNvPr id="8" name="S11-text170"/>
           <p:cNvSpPr txBox="1"/>
           <p:nvPr/>
         </p:nvSpPr>
@@ -4788,7 +4788,7 @@
       </p:sp>
       <p:sp>
         <p:nvSpPr>
-          <p:cNvPr id="9" name="S11-stepno177"/>
+          <p:cNvPr id="9" name="S11-stepno171"/>
           <p:cNvSpPr txBox="1"/>
           <p:nvPr/>
         </p:nvSpPr>
@@ -4833,7 +4833,7 @@
       </p:sp>
       <p:sp>
         <p:nvSpPr>
-          <p:cNvPr id="10" name="S11-text178"/>
+          <p:cNvPr id="10" name="S11-text172"/>
           <p:cNvSpPr txBox="1"/>
           <p:nvPr/>
         </p:nvSpPr>
@@ -4872,7 +4872,7 @@
       </p:sp>
       <p:sp>
         <p:nvSpPr>
-          <p:cNvPr id="11" name="S11-stepno179"/>
+          <p:cNvPr id="11" name="S11-stepno173"/>
           <p:cNvSpPr txBox="1"/>
           <p:nvPr/>
         </p:nvSpPr>
@@ -4917,7 +4917,7 @@
       </p:sp>
       <p:sp>
         <p:nvSpPr>
-          <p:cNvPr id="12" name="S11-text180"/>
+          <p:cNvPr id="12" name="S11-text174"/>
           <p:cNvSpPr txBox="1"/>
           <p:nvPr/>
         </p:nvSpPr>
@@ -4956,7 +4956,7 @@
       </p:sp>
       <p:sp>
         <p:nvSpPr>
-          <p:cNvPr id="13" name="S11-stepno181"/>
+          <p:cNvPr id="13" name="S11-stepno175"/>
           <p:cNvSpPr txBox="1"/>
           <p:nvPr/>
         </p:nvSpPr>
@@ -5001,7 +5001,7 @@
       </p:sp>
       <p:sp>
         <p:nvSpPr>
-          <p:cNvPr id="14" name="S11-text182"/>
+          <p:cNvPr id="14" name="S11-text176"/>
           <p:cNvSpPr txBox="1"/>
           <p:nvPr/>
         </p:nvSpPr>
@@ -5154,7 +5154,7 @@
       </p:sp>
       <p:sp>
         <p:nvSpPr>
-          <p:cNvPr id="3" name="S12-chip183"/>
+          <p:cNvPr id="3" name="S12-chip177"/>
           <p:cNvSpPr txBox="1"/>
           <p:nvPr/>
         </p:nvSpPr>
@@ -5201,7 +5201,7 @@
       </p:sp>
       <p:sp>
         <p:nvSpPr>
-          <p:cNvPr id="4" name="S12-text184"/>
+          <p:cNvPr id="4" name="S12-text178"/>
           <p:cNvSpPr txBox="1"/>
           <p:nvPr/>
         </p:nvSpPr>
@@ -5257,7 +5257,7 @@
       </p:sp>
       <p:sp>
         <p:nvSpPr>
-          <p:cNvPr id="5" name="S12-chip185"/>
+          <p:cNvPr id="5" name="S12-chip179"/>
           <p:cNvSpPr txBox="1"/>
           <p:nvPr/>
         </p:nvSpPr>
@@ -5304,7 +5304,7 @@
       </p:sp>
       <p:sp>
         <p:nvSpPr>
-          <p:cNvPr id="6" name="S12-text186"/>
+          <p:cNvPr id="6" name="S12-text180"/>
           <p:cNvSpPr txBox="1"/>
           <p:nvPr/>
         </p:nvSpPr>
@@ -5360,7 +5360,7 @@
       </p:sp>
       <p:sp>
         <p:nvSpPr>
-          <p:cNvPr id="7" name="S12-chip187"/>
+          <p:cNvPr id="7" name="S12-chip181"/>
           <p:cNvSpPr txBox="1"/>
           <p:nvPr/>
         </p:nvSpPr>
@@ -5407,7 +5407,7 @@
       </p:sp>
       <p:sp>
         <p:nvSpPr>
-          <p:cNvPr id="8" name="S12-text188"/>
+          <p:cNvPr id="8" name="S12-text182"/>
           <p:cNvSpPr txBox="1"/>
           <p:nvPr/>
         </p:nvSpPr>
@@ -5577,7 +5577,7 @@
       </p:sp>
       <p:sp>
         <p:nvSpPr>
-          <p:cNvPr id="3" name="S13-card189"/>
+          <p:cNvPr id="3" name="S13-card183"/>
           <p:cNvSpPr/>
           <p:nvPr/>
         </p:nvSpPr>
@@ -5604,7 +5604,7 @@
       </p:sp>
       <p:sp>
         <p:nvSpPr>
-          <p:cNvPr id="4" name="S13-cardtext190"/>
+          <p:cNvPr id="4" name="S13-cardtext184"/>
           <p:cNvSpPr txBox="1"/>
           <p:nvPr/>
         </p:nvSpPr>
@@ -5646,7 +5646,7 @@
       </p:sp>
       <p:sp>
         <p:nvSpPr>
-          <p:cNvPr id="5" name="S13-chip191"/>
+          <p:cNvPr id="5" name="S13-chip185"/>
           <p:cNvSpPr txBox="1"/>
           <p:nvPr/>
         </p:nvSpPr>
@@ -5693,7 +5693,7 @@
       </p:sp>
       <p:sp>
         <p:nvSpPr>
-          <p:cNvPr id="6" name="S13-text192"/>
+          <p:cNvPr id="6" name="S13-text186"/>
           <p:cNvSpPr txBox="1"/>
           <p:nvPr/>
         </p:nvSpPr>
@@ -5732,7 +5732,7 @@
       </p:sp>
       <p:sp>
         <p:nvSpPr>
-          <p:cNvPr id="7" name="S13-text193"/>
+          <p:cNvPr id="7" name="S13-text187"/>
           <p:cNvSpPr txBox="1"/>
           <p:nvPr/>
         </p:nvSpPr>
@@ -5771,7 +5771,7 @@
       </p:sp>
       <p:sp>
         <p:nvSpPr>
-          <p:cNvPr id="8" name="S13-text194"/>
+          <p:cNvPr id="8" name="S13-text188"/>
           <p:cNvSpPr txBox="1"/>
           <p:nvPr/>
         </p:nvSpPr>
@@ -5810,7 +5810,7 @@
       </p:sp>
       <p:sp>
         <p:nvSpPr>
-          <p:cNvPr id="9" name="S13-text195"/>
+          <p:cNvPr id="9" name="S13-text189"/>
           <p:cNvSpPr txBox="1"/>
           <p:nvPr/>
         </p:nvSpPr>
@@ -5849,7 +5849,7 @@
       </p:sp>
       <p:sp>
         <p:nvSpPr>
-          <p:cNvPr id="10" name="S13-text196"/>
+          <p:cNvPr id="10" name="S13-text190"/>
           <p:cNvSpPr txBox="1"/>
           <p:nvPr/>
         </p:nvSpPr>
@@ -5888,7 +5888,7 @@
       </p:sp>
       <p:sp>
         <p:nvSpPr>
-          <p:cNvPr id="11" name="S13-text197"/>
+          <p:cNvPr id="11" name="S13-text191"/>
           <p:cNvSpPr txBox="1"/>
           <p:nvPr/>
         </p:nvSpPr>
@@ -5927,7 +5927,7 @@
       </p:sp>
       <p:sp>
         <p:nvSpPr>
-          <p:cNvPr id="12" name="S13-chip198"/>
+          <p:cNvPr id="12" name="S13-chip192"/>
           <p:cNvSpPr txBox="1"/>
           <p:nvPr/>
         </p:nvSpPr>
@@ -5974,7 +5974,7 @@
       </p:sp>
       <p:sp>
         <p:nvSpPr>
-          <p:cNvPr id="13" name="S13-text199"/>
+          <p:cNvPr id="13" name="S13-text193"/>
           <p:cNvSpPr txBox="1"/>
           <p:nvPr/>
         </p:nvSpPr>
@@ -6013,7 +6013,7 @@
       </p:sp>
       <p:sp>
         <p:nvSpPr>
-          <p:cNvPr id="14" name="S13-text200"/>
+          <p:cNvPr id="14" name="S13-text194"/>
           <p:cNvSpPr txBox="1"/>
           <p:nvPr/>
         </p:nvSpPr>
@@ -6052,7 +6052,7 @@
       </p:sp>
       <p:sp>
         <p:nvSpPr>
-          <p:cNvPr id="15" name="S13-text201"/>
+          <p:cNvPr id="15" name="S13-text195"/>
           <p:cNvSpPr txBox="1"/>
           <p:nvPr/>
         </p:nvSpPr>
@@ -6091,7 +6091,7 @@
       </p:sp>
       <p:sp>
         <p:nvSpPr>
-          <p:cNvPr id="16" name="S13-text202"/>
+          <p:cNvPr id="16" name="S13-text196"/>
           <p:cNvSpPr txBox="1"/>
           <p:nvPr/>
         </p:nvSpPr>
@@ -6244,7 +6244,7 @@
       </p:sp>
       <p:sp>
         <p:nvSpPr>
-          <p:cNvPr id="3" name="S14-text203"/>
+          <p:cNvPr id="3" name="S14-text197"/>
           <p:cNvSpPr txBox="1"/>
           <p:nvPr/>
         </p:nvSpPr>
@@ -6283,7 +6283,7 @@
       </p:sp>
       <p:sp>
         <p:nvSpPr>
-          <p:cNvPr id="4" name="S14-card204"/>
+          <p:cNvPr id="4" name="S14-card198"/>
           <p:cNvSpPr/>
           <p:nvPr/>
         </p:nvSpPr>
@@ -6310,7 +6310,7 @@
       </p:sp>
       <p:sp>
         <p:nvSpPr>
-          <p:cNvPr id="5" name="S14-cardtext205"/>
+          <p:cNvPr id="5" name="S14-cardtext199"/>
           <p:cNvSpPr txBox="1"/>
           <p:nvPr/>
         </p:nvSpPr>
@@ -6352,7 +6352,7 @@
       </p:sp>
       <p:sp>
         <p:nvSpPr>
-          <p:cNvPr id="6" name="S14-chip206"/>
+          <p:cNvPr id="6" name="S14-chip200"/>
           <p:cNvSpPr txBox="1"/>
           <p:nvPr/>
         </p:nvSpPr>
@@ -6399,7 +6399,7 @@
       </p:sp>
       <p:sp>
         <p:nvSpPr>
-          <p:cNvPr id="7" name="S14-figure207" descr="그믐달: 왼쪽이 가늘게 밝은 눈썹 모양"/>
+          <p:cNvPr id="7" name="S14-figure201" descr="그믐달: 왼쪽이 가늘게 밝은 눈썹 모양"/>
           <p:cNvSpPr/>
           <p:nvPr/>
         </p:nvSpPr>
@@ -6424,7 +6424,7 @@
       </p:sp>
       <p:sp>
         <p:nvSpPr>
-          <p:cNvPr id="8" name="S14-mark208"/>
+          <p:cNvPr id="8" name="S14-mark202"/>
           <p:cNvSpPr/>
           <p:nvPr/>
         </p:nvSpPr>
@@ -6520,73 +6520,73 @@
                   <a:pt x="777240" y="0"/>
                 </a:lnTo>
                 <a:lnTo>
-                  <a:pt x="721279" y="6995"/>
-                </a:lnTo>
-                <a:lnTo>
-                  <a:pt x="666872" y="26426"/>
-                </a:lnTo>
-                <a:lnTo>
-                  <a:pt x="614020" y="59070"/>
-                </a:lnTo>
-                <a:lnTo>
-                  <a:pt x="563499" y="104150"/>
-                </a:lnTo>
-                <a:lnTo>
-                  <a:pt x="516865" y="160889"/>
-                </a:lnTo>
-                <a:lnTo>
-                  <a:pt x="474894" y="227731"/>
-                </a:lnTo>
-                <a:lnTo>
-                  <a:pt x="438363" y="303901"/>
-                </a:lnTo>
-                <a:lnTo>
-                  <a:pt x="407274" y="388620"/>
-                </a:lnTo>
-                <a:lnTo>
-                  <a:pt x="382402" y="479557"/>
-                </a:lnTo>
-                <a:lnTo>
-                  <a:pt x="364526" y="575935"/>
-                </a:lnTo>
-                <a:lnTo>
-                  <a:pt x="353644" y="675422"/>
-                </a:lnTo>
-                <a:lnTo>
-                  <a:pt x="349758" y="777240"/>
-                </a:lnTo>
-                <a:lnTo>
-                  <a:pt x="353644" y="879058"/>
-                </a:lnTo>
-                <a:lnTo>
-                  <a:pt x="364526" y="978545"/>
-                </a:lnTo>
-                <a:lnTo>
-                  <a:pt x="382402" y="1074923"/>
-                </a:lnTo>
-                <a:lnTo>
-                  <a:pt x="407274" y="1165860"/>
-                </a:lnTo>
-                <a:lnTo>
-                  <a:pt x="438363" y="1250579"/>
-                </a:lnTo>
-                <a:lnTo>
-                  <a:pt x="474894" y="1326749"/>
-                </a:lnTo>
-                <a:lnTo>
-                  <a:pt x="516865" y="1393591"/>
-                </a:lnTo>
-                <a:lnTo>
-                  <a:pt x="563499" y="1450330"/>
-                </a:lnTo>
-                <a:lnTo>
-                  <a:pt x="614020" y="1495410"/>
-                </a:lnTo>
-                <a:lnTo>
-                  <a:pt x="666872" y="1528054"/>
-                </a:lnTo>
-                <a:lnTo>
-                  <a:pt x="721279" y="1547485"/>
+                  <a:pt x="711175" y="6995"/>
+                </a:lnTo>
+                <a:lnTo>
+                  <a:pt x="646664" y="26426"/>
+                </a:lnTo>
+                <a:lnTo>
+                  <a:pt x="583707" y="59070"/>
+                </a:lnTo>
+                <a:lnTo>
+                  <a:pt x="524637" y="104150"/>
+                </a:lnTo>
+                <a:lnTo>
+                  <a:pt x="469453" y="160889"/>
+                </a:lnTo>
+                <a:lnTo>
+                  <a:pt x="419710" y="227731"/>
+                </a:lnTo>
+                <a:lnTo>
+                  <a:pt x="376184" y="303901"/>
+                </a:lnTo>
+                <a:lnTo>
+                  <a:pt x="339654" y="388620"/>
+                </a:lnTo>
+                <a:lnTo>
+                  <a:pt x="310119" y="479557"/>
+                </a:lnTo>
+                <a:lnTo>
+                  <a:pt x="289133" y="575935"/>
+                </a:lnTo>
+                <a:lnTo>
+                  <a:pt x="276697" y="675422"/>
+                </a:lnTo>
+                <a:lnTo>
+                  <a:pt x="272034" y="777240"/>
+                </a:lnTo>
+                <a:lnTo>
+                  <a:pt x="276697" y="879058"/>
+                </a:lnTo>
+                <a:lnTo>
+                  <a:pt x="289133" y="978545"/>
+                </a:lnTo>
+                <a:lnTo>
+                  <a:pt x="310119" y="1074923"/>
+                </a:lnTo>
+                <a:lnTo>
+                  <a:pt x="339654" y="1165860"/>
+                </a:lnTo>
+                <a:lnTo>
+                  <a:pt x="376184" y="1250579"/>
+                </a:lnTo>
+                <a:lnTo>
+                  <a:pt x="419710" y="1326749"/>
+                </a:lnTo>
+                <a:lnTo>
+                  <a:pt x="469453" y="1393591"/>
+                </a:lnTo>
+                <a:lnTo>
+                  <a:pt x="524637" y="1450330"/>
+                </a:lnTo>
+                <a:lnTo>
+                  <a:pt x="583707" y="1495410"/>
+                </a:lnTo>
+                <a:lnTo>
+                  <a:pt x="646664" y="1528054"/>
+                </a:lnTo>
+                <a:lnTo>
+                  <a:pt x="711175" y="1547485"/>
                 </a:lnTo>
                 <a:lnTo>
                   <a:pt x="777240" y="1554480"/>
@@ -6603,7 +6603,7 @@
       </p:sp>
       <p:sp>
         <p:nvSpPr>
-          <p:cNvPr id="9" name="S14-mark209"/>
+          <p:cNvPr id="9" name="S14-mark203"/>
           <p:cNvSpPr/>
           <p:nvPr/>
         </p:nvSpPr>
@@ -6626,7 +6626,7 @@
       </p:sp>
       <p:sp>
         <p:nvSpPr>
-          <p:cNvPr id="10" name="S14-chip210"/>
+          <p:cNvPr id="10" name="S14-chip204"/>
           <p:cNvSpPr txBox="1"/>
           <p:nvPr/>
         </p:nvSpPr>
@@ -6673,7 +6673,7 @@
       </p:sp>
       <p:sp>
         <p:nvSpPr>
-          <p:cNvPr id="11" name="S14-figure211" descr="초승달: 오른쪽이 가늘게 밝은 눈썹 모양"/>
+          <p:cNvPr id="11" name="S14-figure205" descr="초승달: 오른쪽이 가늘게 밝은 눈썹 모양"/>
           <p:cNvSpPr/>
           <p:nvPr/>
         </p:nvSpPr>
@@ -6698,7 +6698,7 @@
       </p:sp>
       <p:sp>
         <p:nvSpPr>
-          <p:cNvPr id="12" name="S14-mark212"/>
+          <p:cNvPr id="12" name="S14-mark206"/>
           <p:cNvSpPr/>
           <p:nvPr/>
         </p:nvSpPr>
@@ -6794,73 +6794,73 @@
                   <a:pt x="0" y="0"/>
                 </a:lnTo>
                 <a:lnTo>
-                  <a:pt x="55961" y="6995"/>
-                </a:lnTo>
-                <a:lnTo>
-                  <a:pt x="110368" y="26426"/>
-                </a:lnTo>
-                <a:lnTo>
-                  <a:pt x="163220" y="59070"/>
-                </a:lnTo>
-                <a:lnTo>
-                  <a:pt x="213741" y="104150"/>
-                </a:lnTo>
-                <a:lnTo>
-                  <a:pt x="260375" y="160889"/>
-                </a:lnTo>
-                <a:lnTo>
-                  <a:pt x="302346" y="227731"/>
-                </a:lnTo>
-                <a:lnTo>
-                  <a:pt x="338877" y="303901"/>
-                </a:lnTo>
-                <a:lnTo>
-                  <a:pt x="369966" y="388620"/>
-                </a:lnTo>
-                <a:lnTo>
-                  <a:pt x="394838" y="479557"/>
-                </a:lnTo>
-                <a:lnTo>
-                  <a:pt x="412714" y="575935"/>
-                </a:lnTo>
-                <a:lnTo>
-                  <a:pt x="423596" y="675422"/>
-                </a:lnTo>
-                <a:lnTo>
-                  <a:pt x="427482" y="777240"/>
-                </a:lnTo>
-                <a:lnTo>
-                  <a:pt x="423596" y="879058"/>
-                </a:lnTo>
-                <a:lnTo>
-                  <a:pt x="412714" y="978545"/>
-                </a:lnTo>
-                <a:lnTo>
-                  <a:pt x="394838" y="1074923"/>
-                </a:lnTo>
-                <a:lnTo>
-                  <a:pt x="369966" y="1165860"/>
-                </a:lnTo>
-                <a:lnTo>
-                  <a:pt x="338877" y="1250579"/>
-                </a:lnTo>
-                <a:lnTo>
-                  <a:pt x="302346" y="1326749"/>
-                </a:lnTo>
-                <a:lnTo>
-                  <a:pt x="260375" y="1393591"/>
-                </a:lnTo>
-                <a:lnTo>
-                  <a:pt x="213741" y="1450330"/>
-                </a:lnTo>
-                <a:lnTo>
-                  <a:pt x="163220" y="1495410"/>
-                </a:lnTo>
-                <a:lnTo>
-                  <a:pt x="110368" y="1528054"/>
-                </a:lnTo>
-                <a:lnTo>
-                  <a:pt x="55961" y="1547485"/>
+                  <a:pt x="66065" y="6995"/>
+                </a:lnTo>
+                <a:lnTo>
+                  <a:pt x="130576" y="26426"/>
+                </a:lnTo>
+                <a:lnTo>
+                  <a:pt x="193533" y="59070"/>
+                </a:lnTo>
+                <a:lnTo>
+                  <a:pt x="252603" y="104150"/>
+                </a:lnTo>
+                <a:lnTo>
+                  <a:pt x="307787" y="160889"/>
+                </a:lnTo>
+                <a:lnTo>
+                  <a:pt x="357530" y="227731"/>
+                </a:lnTo>
+                <a:lnTo>
+                  <a:pt x="401056" y="303901"/>
+                </a:lnTo>
+                <a:lnTo>
+                  <a:pt x="437586" y="388620"/>
+                </a:lnTo>
+                <a:lnTo>
+                  <a:pt x="467121" y="479557"/>
+                </a:lnTo>
+                <a:lnTo>
+                  <a:pt x="488107" y="575935"/>
+                </a:lnTo>
+                <a:lnTo>
+                  <a:pt x="500543" y="675422"/>
+                </a:lnTo>
+                <a:lnTo>
+                  <a:pt x="505206" y="777240"/>
+                </a:lnTo>
+                <a:lnTo>
+                  <a:pt x="500543" y="879058"/>
+                </a:lnTo>
+                <a:lnTo>
+                  <a:pt x="488107" y="978545"/>
+                </a:lnTo>
+                <a:lnTo>
+                  <a:pt x="467121" y="1074923"/>
+                </a:lnTo>
+                <a:lnTo>
+                  <a:pt x="437586" y="1165860"/>
+                </a:lnTo>
+                <a:lnTo>
+                  <a:pt x="401056" y="1250579"/>
+                </a:lnTo>
+                <a:lnTo>
+                  <a:pt x="357530" y="1326749"/>
+                </a:lnTo>
+                <a:lnTo>
+                  <a:pt x="307787" y="1393591"/>
+                </a:lnTo>
+                <a:lnTo>
+                  <a:pt x="252603" y="1450330"/>
+                </a:lnTo>
+                <a:lnTo>
+                  <a:pt x="193533" y="1495410"/>
+                </a:lnTo>
+                <a:lnTo>
+                  <a:pt x="130576" y="1528054"/>
+                </a:lnTo>
+                <a:lnTo>
+                  <a:pt x="66065" y="1547485"/>
                 </a:lnTo>
                 <a:lnTo>
                   <a:pt x="0" y="1554480"/>
@@ -6877,7 +6877,7 @@
       </p:sp>
       <p:sp>
         <p:nvSpPr>
-          <p:cNvPr id="13" name="S14-mark213"/>
+          <p:cNvPr id="13" name="S14-mark207"/>
           <p:cNvSpPr/>
           <p:nvPr/>
         </p:nvSpPr>
@@ -6900,7 +6900,7 @@
       </p:sp>
       <p:sp>
         <p:nvSpPr>
-          <p:cNvPr id="14" name="S14-chip214"/>
+          <p:cNvPr id="14" name="S14-chip208"/>
           <p:cNvSpPr txBox="1"/>
           <p:nvPr/>
         </p:nvSpPr>
@@ -6947,7 +6947,7 @@
       </p:sp>
       <p:sp>
         <p:nvSpPr>
-          <p:cNvPr id="15" name="S14-figure215" descr="하현달: 왼쪽 반이 밝은 반달"/>
+          <p:cNvPr id="15" name="S14-figure209" descr="하현달: 왼쪽 반이 밝은 반달"/>
           <p:cNvSpPr/>
           <p:nvPr/>
         </p:nvSpPr>
@@ -6972,7 +6972,7 @@
       </p:sp>
       <p:sp>
         <p:nvSpPr>
-          <p:cNvPr id="16" name="S14-mark216"/>
+          <p:cNvPr id="16" name="S14-mark210"/>
           <p:cNvSpPr/>
           <p:nvPr/>
         </p:nvSpPr>
@@ -7151,7 +7151,7 @@
       </p:sp>
       <p:sp>
         <p:nvSpPr>
-          <p:cNvPr id="17" name="S14-mark217"/>
+          <p:cNvPr id="17" name="S14-mark211"/>
           <p:cNvSpPr/>
           <p:nvPr/>
         </p:nvSpPr>
@@ -7288,7 +7288,7 @@
       </p:sp>
       <p:sp>
         <p:nvSpPr>
-          <p:cNvPr id="3" name="S15-card218"/>
+          <p:cNvPr id="3" name="S15-card212"/>
           <p:cNvSpPr/>
           <p:nvPr/>
         </p:nvSpPr>
@@ -7315,7 +7315,7 @@
       </p:sp>
       <p:sp>
         <p:nvSpPr>
-          <p:cNvPr id="4" name="S15-cardtext219"/>
+          <p:cNvPr id="4" name="S15-cardtext213"/>
           <p:cNvSpPr txBox="1"/>
           <p:nvPr/>
         </p:nvSpPr>
@@ -7377,7 +7377,7 @@
       </p:sp>
       <p:sp>
         <p:nvSpPr>
-          <p:cNvPr id="5" name="S15-chip220"/>
+          <p:cNvPr id="5" name="S15-chip214"/>
           <p:cNvSpPr txBox="1"/>
           <p:nvPr/>
         </p:nvSpPr>
@@ -7424,7 +7424,7 @@
       </p:sp>
       <p:sp>
         <p:nvSpPr>
-          <p:cNvPr id="6" name="S15-chip221"/>
+          <p:cNvPr id="6" name="S15-chip215"/>
           <p:cNvSpPr txBox="1"/>
           <p:nvPr/>
         </p:nvSpPr>
@@ -7471,7 +7471,7 @@
       </p:sp>
       <p:sp>
         <p:nvSpPr>
-          <p:cNvPr id="7" name="S15-text222"/>
+          <p:cNvPr id="7" name="S15-text216"/>
           <p:cNvSpPr txBox="1"/>
           <p:nvPr/>
         </p:nvSpPr>
@@ -7510,7 +7510,7 @@
       </p:sp>
       <p:sp>
         <p:nvSpPr>
-          <p:cNvPr id="8" name="S15-text223"/>
+          <p:cNvPr id="8" name="S15-text217"/>
           <p:cNvSpPr txBox="1"/>
           <p:nvPr/>
         </p:nvSpPr>
@@ -7566,7 +7566,7 @@
       </p:sp>
       <p:sp>
         <p:nvSpPr>
-          <p:cNvPr id="9" name="S15-text224"/>
+          <p:cNvPr id="9" name="S15-text218"/>
           <p:cNvSpPr txBox="1"/>
           <p:nvPr/>
         </p:nvSpPr>
@@ -7622,7 +7622,7 @@
       </p:sp>
       <p:sp>
         <p:nvSpPr>
-          <p:cNvPr id="10" name="S15-text225"/>
+          <p:cNvPr id="10" name="S15-text219"/>
           <p:cNvSpPr txBox="1"/>
           <p:nvPr/>
         </p:nvSpPr>
@@ -7678,7 +7678,7 @@
       </p:sp>
       <p:sp>
         <p:nvSpPr>
-          <p:cNvPr id="11" name="S15-text226"/>
+          <p:cNvPr id="11" name="S15-text220"/>
           <p:cNvSpPr txBox="1"/>
           <p:nvPr/>
         </p:nvSpPr>
@@ -7831,7 +7831,7 @@
       </p:sp>
       <p:sp>
         <p:nvSpPr>
-          <p:cNvPr id="3" name="S16-figure227" descr="남쪽을 바라보고 선 사람(가운데)을 위에서 본 그림: 앞은 남, 뒤는 북, 왼쪽은 동, 오른쪽은 서"/>
+          <p:cNvPr id="3" name="S16-figure221" descr="남쪽을 바라보고 선 사람(가운데)을 위에서 본 그림: 앞은 남, 뒤는 북, 왼쪽은 동, 오른쪽은 서"/>
           <p:cNvSpPr/>
           <p:nvPr/>
         </p:nvSpPr>
@@ -7856,7 +7856,7 @@
       </p:sp>
       <p:sp>
         <p:nvSpPr>
-          <p:cNvPr id="4" name="S16-mark228"/>
+          <p:cNvPr id="4" name="S16-mark222"/>
           <p:cNvSpPr/>
           <p:nvPr/>
         </p:nvSpPr>
@@ -7880,7 +7880,7 @@
       </p:sp>
       <p:sp>
         <p:nvSpPr>
-          <p:cNvPr id="5" name="S16-mark229"/>
+          <p:cNvPr id="5" name="S16-mark223"/>
           <p:cNvSpPr/>
           <p:nvPr/>
         </p:nvSpPr>
@@ -7904,7 +7904,7 @@
       </p:sp>
       <p:sp>
         <p:nvSpPr>
-          <p:cNvPr id="6" name="S16-mark230"/>
+          <p:cNvPr id="6" name="S16-mark224"/>
           <p:cNvSpPr/>
           <p:nvPr/>
         </p:nvSpPr>
@@ -7928,7 +7928,7 @@
       </p:sp>
       <p:sp>
         <p:nvSpPr>
-          <p:cNvPr id="7" name="S16-mark231"/>
+          <p:cNvPr id="7" name="S16-mark225"/>
           <p:cNvSpPr/>
           <p:nvPr/>
         </p:nvSpPr>
@@ -7952,7 +7952,7 @@
       </p:sp>
       <p:sp>
         <p:nvSpPr>
-          <p:cNvPr id="8" name="S16-label233"/>
+          <p:cNvPr id="8" name="S16-label227"/>
           <p:cNvSpPr txBox="1"/>
           <p:nvPr/>
         </p:nvSpPr>
@@ -7991,7 +7991,7 @@
       </p:sp>
       <p:sp>
         <p:nvSpPr>
-          <p:cNvPr id="9" name="S16-label235"/>
+          <p:cNvPr id="9" name="S16-label229"/>
           <p:cNvSpPr txBox="1"/>
           <p:nvPr/>
         </p:nvSpPr>
@@ -8030,7 +8030,7 @@
       </p:sp>
       <p:sp>
         <p:nvSpPr>
-          <p:cNvPr id="10" name="S16-label237"/>
+          <p:cNvPr id="10" name="S16-label231"/>
           <p:cNvSpPr txBox="1"/>
           <p:nvPr/>
         </p:nvSpPr>
@@ -8069,7 +8069,7 @@
       </p:sp>
       <p:sp>
         <p:nvSpPr>
-          <p:cNvPr id="11" name="S16-label239"/>
+          <p:cNvPr id="11" name="S16-label233"/>
           <p:cNvSpPr txBox="1"/>
           <p:nvPr/>
         </p:nvSpPr>
@@ -8108,7 +8108,7 @@
       </p:sp>
       <p:sp>
         <p:nvSpPr>
-          <p:cNvPr id="12" name="S16-card240"/>
+          <p:cNvPr id="12" name="S16-card234"/>
           <p:cNvSpPr/>
           <p:nvPr/>
         </p:nvSpPr>
@@ -8135,7 +8135,7 @@
       </p:sp>
       <p:sp>
         <p:nvSpPr>
-          <p:cNvPr id="13" name="S16-cardtext241"/>
+          <p:cNvPr id="13" name="S16-cardtext235"/>
           <p:cNvSpPr txBox="1"/>
           <p:nvPr/>
         </p:nvSpPr>
@@ -8177,7 +8177,7 @@
       </p:sp>
       <p:sp>
         <p:nvSpPr>
-          <p:cNvPr id="14" name="S16-card242"/>
+          <p:cNvPr id="14" name="S16-card236"/>
           <p:cNvSpPr/>
           <p:nvPr/>
         </p:nvSpPr>
@@ -8204,7 +8204,7 @@
       </p:sp>
       <p:sp>
         <p:nvSpPr>
-          <p:cNvPr id="15" name="S16-cardtext243"/>
+          <p:cNvPr id="15" name="S16-cardtext237"/>
           <p:cNvSpPr txBox="1"/>
           <p:nvPr/>
         </p:nvSpPr>
@@ -8246,7 +8246,7 @@
       </p:sp>
       <p:sp>
         <p:nvSpPr>
-          <p:cNvPr id="16" name="S16-card244"/>
+          <p:cNvPr id="16" name="S16-card238"/>
           <p:cNvSpPr/>
           <p:nvPr/>
         </p:nvSpPr>
@@ -8273,7 +8273,7 @@
       </p:sp>
       <p:sp>
         <p:nvSpPr>
-          <p:cNvPr id="17" name="S16-cardtext245"/>
+          <p:cNvPr id="17" name="S16-cardtext239"/>
           <p:cNvSpPr txBox="1"/>
           <p:nvPr/>
         </p:nvSpPr>
@@ -9168,73 +9168,73 @@
                   <a:pt x="685800" y="0"/>
                 </a:lnTo>
                 <a:lnTo>
-                  <a:pt x="636422" y="6172"/>
-                </a:lnTo>
-                <a:lnTo>
-                  <a:pt x="588416" y="23317"/>
-                </a:lnTo>
-                <a:lnTo>
-                  <a:pt x="541782" y="52121"/>
-                </a:lnTo>
-                <a:lnTo>
-                  <a:pt x="497205" y="91897"/>
-                </a:lnTo>
-                <a:lnTo>
-                  <a:pt x="456057" y="141961"/>
-                </a:lnTo>
-                <a:lnTo>
-                  <a:pt x="419024" y="200939"/>
-                </a:lnTo>
-                <a:lnTo>
-                  <a:pt x="386791" y="268148"/>
-                </a:lnTo>
-                <a:lnTo>
-                  <a:pt x="359359" y="342900"/>
-                </a:lnTo>
-                <a:lnTo>
-                  <a:pt x="337414" y="423139"/>
-                </a:lnTo>
-                <a:lnTo>
-                  <a:pt x="321640" y="508178"/>
-                </a:lnTo>
-                <a:lnTo>
-                  <a:pt x="312039" y="595960"/>
-                </a:lnTo>
-                <a:lnTo>
-                  <a:pt x="308610" y="685800"/>
-                </a:lnTo>
-                <a:lnTo>
-                  <a:pt x="312039" y="775640"/>
-                </a:lnTo>
-                <a:lnTo>
-                  <a:pt x="321640" y="863422"/>
-                </a:lnTo>
-                <a:lnTo>
-                  <a:pt x="337414" y="948461"/>
-                </a:lnTo>
-                <a:lnTo>
-                  <a:pt x="359359" y="1028700"/>
-                </a:lnTo>
-                <a:lnTo>
-                  <a:pt x="386791" y="1103452"/>
-                </a:lnTo>
-                <a:lnTo>
-                  <a:pt x="419024" y="1170661"/>
-                </a:lnTo>
-                <a:lnTo>
-                  <a:pt x="456057" y="1229639"/>
-                </a:lnTo>
-                <a:lnTo>
-                  <a:pt x="497205" y="1279703"/>
-                </a:lnTo>
-                <a:lnTo>
-                  <a:pt x="541782" y="1319479"/>
-                </a:lnTo>
-                <a:lnTo>
-                  <a:pt x="588416" y="1348283"/>
-                </a:lnTo>
-                <a:lnTo>
-                  <a:pt x="636422" y="1365428"/>
+                  <a:pt x="627507" y="6172"/>
+                </a:lnTo>
+                <a:lnTo>
+                  <a:pt x="570586" y="23317"/>
+                </a:lnTo>
+                <a:lnTo>
+                  <a:pt x="515036" y="52121"/>
+                </a:lnTo>
+                <a:lnTo>
+                  <a:pt x="462915" y="91897"/>
+                </a:lnTo>
+                <a:lnTo>
+                  <a:pt x="414223" y="141961"/>
+                </a:lnTo>
+                <a:lnTo>
+                  <a:pt x="370332" y="200939"/>
+                </a:lnTo>
+                <a:lnTo>
+                  <a:pt x="331927" y="268148"/>
+                </a:lnTo>
+                <a:lnTo>
+                  <a:pt x="299695" y="342900"/>
+                </a:lnTo>
+                <a:lnTo>
+                  <a:pt x="273634" y="423139"/>
+                </a:lnTo>
+                <a:lnTo>
+                  <a:pt x="255118" y="508178"/>
+                </a:lnTo>
+                <a:lnTo>
+                  <a:pt x="244145" y="595960"/>
+                </a:lnTo>
+                <a:lnTo>
+                  <a:pt x="240030" y="685800"/>
+                </a:lnTo>
+                <a:lnTo>
+                  <a:pt x="244145" y="775640"/>
+                </a:lnTo>
+                <a:lnTo>
+                  <a:pt x="255118" y="863422"/>
+                </a:lnTo>
+                <a:lnTo>
+                  <a:pt x="273634" y="948461"/>
+                </a:lnTo>
+                <a:lnTo>
+                  <a:pt x="299695" y="1028700"/>
+                </a:lnTo>
+                <a:lnTo>
+                  <a:pt x="331927" y="1103452"/>
+                </a:lnTo>
+                <a:lnTo>
+                  <a:pt x="370332" y="1170661"/>
+                </a:lnTo>
+                <a:lnTo>
+                  <a:pt x="414223" y="1229639"/>
+                </a:lnTo>
+                <a:lnTo>
+                  <a:pt x="462915" y="1279703"/>
+                </a:lnTo>
+                <a:lnTo>
+                  <a:pt x="515036" y="1319479"/>
+                </a:lnTo>
+                <a:lnTo>
+                  <a:pt x="570586" y="1348283"/>
+                </a:lnTo>
+                <a:lnTo>
+                  <a:pt x="627507" y="1365428"/>
                 </a:lnTo>
                 <a:lnTo>
                   <a:pt x="685800" y="1371600"/>
@@ -9700,73 +9700,73 @@
                   <a:pt x="0" y="0"/>
                 </a:lnTo>
                 <a:lnTo>
-                  <a:pt x="49378" y="6172"/>
-                </a:lnTo>
-                <a:lnTo>
-                  <a:pt x="97384" y="23317"/>
-                </a:lnTo>
-                <a:lnTo>
-                  <a:pt x="144018" y="52121"/>
-                </a:lnTo>
-                <a:lnTo>
-                  <a:pt x="188595" y="91897"/>
-                </a:lnTo>
-                <a:lnTo>
-                  <a:pt x="229743" y="141961"/>
-                </a:lnTo>
-                <a:lnTo>
-                  <a:pt x="266776" y="200939"/>
-                </a:lnTo>
-                <a:lnTo>
-                  <a:pt x="299009" y="268148"/>
-                </a:lnTo>
-                <a:lnTo>
-                  <a:pt x="326441" y="342900"/>
-                </a:lnTo>
-                <a:lnTo>
-                  <a:pt x="348386" y="423139"/>
-                </a:lnTo>
-                <a:lnTo>
-                  <a:pt x="364160" y="508178"/>
-                </a:lnTo>
-                <a:lnTo>
-                  <a:pt x="373761" y="595960"/>
-                </a:lnTo>
-                <a:lnTo>
-                  <a:pt x="377190" y="685800"/>
-                </a:lnTo>
-                <a:lnTo>
-                  <a:pt x="373761" y="775640"/>
-                </a:lnTo>
-                <a:lnTo>
-                  <a:pt x="364160" y="863422"/>
-                </a:lnTo>
-                <a:lnTo>
-                  <a:pt x="348386" y="948461"/>
-                </a:lnTo>
-                <a:lnTo>
-                  <a:pt x="326441" y="1028700"/>
-                </a:lnTo>
-                <a:lnTo>
-                  <a:pt x="299009" y="1103452"/>
-                </a:lnTo>
-                <a:lnTo>
-                  <a:pt x="266776" y="1170661"/>
-                </a:lnTo>
-                <a:lnTo>
-                  <a:pt x="229743" y="1229639"/>
-                </a:lnTo>
-                <a:lnTo>
-                  <a:pt x="188595" y="1279703"/>
-                </a:lnTo>
-                <a:lnTo>
-                  <a:pt x="144018" y="1319479"/>
-                </a:lnTo>
-                <a:lnTo>
-                  <a:pt x="97384" y="1348283"/>
-                </a:lnTo>
-                <a:lnTo>
-                  <a:pt x="49378" y="1365428"/>
+                  <a:pt x="58293" y="6172"/>
+                </a:lnTo>
+                <a:lnTo>
+                  <a:pt x="115214" y="23317"/>
+                </a:lnTo>
+                <a:lnTo>
+                  <a:pt x="170764" y="52121"/>
+                </a:lnTo>
+                <a:lnTo>
+                  <a:pt x="222885" y="91897"/>
+                </a:lnTo>
+                <a:lnTo>
+                  <a:pt x="271577" y="141961"/>
+                </a:lnTo>
+                <a:lnTo>
+                  <a:pt x="315468" y="200939"/>
+                </a:lnTo>
+                <a:lnTo>
+                  <a:pt x="353873" y="268148"/>
+                </a:lnTo>
+                <a:lnTo>
+                  <a:pt x="386105" y="342900"/>
+                </a:lnTo>
+                <a:lnTo>
+                  <a:pt x="412166" y="423139"/>
+                </a:lnTo>
+                <a:lnTo>
+                  <a:pt x="430682" y="508178"/>
+                </a:lnTo>
+                <a:lnTo>
+                  <a:pt x="441655" y="595960"/>
+                </a:lnTo>
+                <a:lnTo>
+                  <a:pt x="445770" y="685800"/>
+                </a:lnTo>
+                <a:lnTo>
+                  <a:pt x="441655" y="775640"/>
+                </a:lnTo>
+                <a:lnTo>
+                  <a:pt x="430682" y="863422"/>
+                </a:lnTo>
+                <a:lnTo>
+                  <a:pt x="412166" y="948461"/>
+                </a:lnTo>
+                <a:lnTo>
+                  <a:pt x="386105" y="1028700"/>
+                </a:lnTo>
+                <a:lnTo>
+                  <a:pt x="353873" y="1103452"/>
+                </a:lnTo>
+                <a:lnTo>
+                  <a:pt x="315468" y="1170661"/>
+                </a:lnTo>
+                <a:lnTo>
+                  <a:pt x="271577" y="1229639"/>
+                </a:lnTo>
+                <a:lnTo>
+                  <a:pt x="222885" y="1279703"/>
+                </a:lnTo>
+                <a:lnTo>
+                  <a:pt x="170764" y="1319479"/>
+                </a:lnTo>
+                <a:lnTo>
+                  <a:pt x="115214" y="1348283"/>
+                </a:lnTo>
+                <a:lnTo>
+                  <a:pt x="58293" y="1365428"/>
                 </a:lnTo>
                 <a:lnTo>
                   <a:pt x="0" y="1371600"/>
@@ -11002,8 +11002,8 @@
         </p:nvSpPr>
         <p:spPr>
           <a:xfrm>
-            <a:off x="10719626" y="2704740"/>
-            <a:ext cx="331699" cy="331699"/>
+            <a:off x="10653286" y="2663278"/>
+            <a:ext cx="464378" cy="464378"/>
           </a:xfrm>
           <a:prstGeom prst="ellipse">
             <a:avLst/>
@@ -11027,8 +11027,8 @@
         </p:nvSpPr>
         <p:spPr>
           <a:xfrm>
-            <a:off x="9061133" y="2107682"/>
-            <a:ext cx="331699" cy="331699"/>
+            <a:off x="8994793" y="2066220"/>
+            <a:ext cx="464378" cy="464378"/>
           </a:xfrm>
           <a:prstGeom prst="ellipse">
             <a:avLst/>
@@ -11052,8 +11052,8 @@
         </p:nvSpPr>
         <p:spPr>
           <a:xfrm>
-            <a:off x="7402640" y="2771080"/>
-            <a:ext cx="331699" cy="331699"/>
+            <a:off x="7336300" y="2729617"/>
+            <a:ext cx="464378" cy="464378"/>
           </a:xfrm>
           <a:prstGeom prst="ellipse">
             <a:avLst/>
@@ -11077,7 +11077,7 @@
         </p:nvSpPr>
         <p:spPr>
           <a:xfrm>
-            <a:off x="6905092" y="3334967"/>
+            <a:off x="6905092" y="3393015"/>
             <a:ext cx="4643780" cy="331699"/>
           </a:xfrm>
           <a:custGeom>
@@ -11118,7 +11118,7 @@
         </p:nvSpPr>
         <p:spPr>
           <a:xfrm>
-            <a:off x="9890379" y="2903759"/>
+            <a:off x="9890379" y="2961806"/>
             <a:ext cx="331699" cy="431208"/>
           </a:xfrm>
           <a:custGeom>
@@ -11164,7 +11164,7 @@
         </p:nvSpPr>
         <p:spPr>
           <a:xfrm>
-            <a:off x="8364565" y="2771080"/>
+            <a:off x="8364565" y="2829127"/>
             <a:ext cx="398038" cy="414623"/>
           </a:xfrm>
           <a:custGeom>
@@ -11207,8 +11207,8 @@
         </p:nvSpPr>
         <p:spPr>
           <a:xfrm>
-            <a:off x="10885475" y="2704740"/>
-            <a:ext cx="165849" cy="331699"/>
+            <a:off x="10885475" y="2663278"/>
+            <a:ext cx="232189" cy="464378"/>
           </a:xfrm>
           <a:custGeom>
             <a:avLst/>
@@ -11217,78 +11217,78 @@
             <a:cxnLst/>
             <a:rect l="l" t="t" r="r" b="b"/>
             <a:pathLst>
-              <a:path w="165849" h="331699">
+              <a:path w="232189" h="464378">
                 <a:moveTo>
-                  <a:pt x="0" y="331699"/>
+                  <a:pt x="0" y="464378"/>
                 </a:moveTo>
                 <a:lnTo>
-                  <a:pt x="21560" y="330372"/>
-                </a:lnTo>
-                <a:lnTo>
-                  <a:pt x="42789" y="326060"/>
-                </a:lnTo>
-                <a:lnTo>
-                  <a:pt x="63354" y="319094"/>
-                </a:lnTo>
-                <a:lnTo>
-                  <a:pt x="82925" y="309475"/>
-                </a:lnTo>
-                <a:lnTo>
-                  <a:pt x="100836" y="297534"/>
-                </a:lnTo>
-                <a:lnTo>
-                  <a:pt x="117421" y="283271"/>
-                </a:lnTo>
-                <a:lnTo>
-                  <a:pt x="131684" y="266686"/>
-                </a:lnTo>
-                <a:lnTo>
-                  <a:pt x="143625" y="248774"/>
-                </a:lnTo>
-                <a:lnTo>
-                  <a:pt x="153245" y="229204"/>
-                </a:lnTo>
-                <a:lnTo>
-                  <a:pt x="160210" y="208638"/>
-                </a:lnTo>
-                <a:lnTo>
-                  <a:pt x="164523" y="187410"/>
-                </a:lnTo>
-                <a:lnTo>
-                  <a:pt x="165849" y="165849"/>
-                </a:lnTo>
-                <a:lnTo>
-                  <a:pt x="164523" y="144289"/>
-                </a:lnTo>
-                <a:lnTo>
-                  <a:pt x="160210" y="123060"/>
-                </a:lnTo>
-                <a:lnTo>
-                  <a:pt x="153245" y="102495"/>
-                </a:lnTo>
-                <a:lnTo>
-                  <a:pt x="143625" y="82925"/>
-                </a:lnTo>
-                <a:lnTo>
-                  <a:pt x="131684" y="65013"/>
-                </a:lnTo>
-                <a:lnTo>
-                  <a:pt x="117421" y="48428"/>
-                </a:lnTo>
-                <a:lnTo>
-                  <a:pt x="100836" y="34165"/>
-                </a:lnTo>
-                <a:lnTo>
-                  <a:pt x="82925" y="22224"/>
-                </a:lnTo>
-                <a:lnTo>
-                  <a:pt x="63354" y="12605"/>
-                </a:lnTo>
-                <a:lnTo>
-                  <a:pt x="42789" y="5639"/>
-                </a:lnTo>
-                <a:lnTo>
-                  <a:pt x="21560" y="1327"/>
+                  <a:pt x="30185" y="462388"/>
+                </a:lnTo>
+                <a:lnTo>
+                  <a:pt x="60037" y="456417"/>
+                </a:lnTo>
+                <a:lnTo>
+                  <a:pt x="88895" y="446798"/>
+                </a:lnTo>
+                <a:lnTo>
+                  <a:pt x="116095" y="433198"/>
+                </a:lnTo>
+                <a:lnTo>
+                  <a:pt x="141304" y="416282"/>
+                </a:lnTo>
+                <a:lnTo>
+                  <a:pt x="164191" y="396380"/>
+                </a:lnTo>
+                <a:lnTo>
+                  <a:pt x="184093" y="373493"/>
+                </a:lnTo>
+                <a:lnTo>
+                  <a:pt x="201009" y="348284"/>
+                </a:lnTo>
+                <a:lnTo>
+                  <a:pt x="214609" y="321084"/>
+                </a:lnTo>
+                <a:lnTo>
+                  <a:pt x="224228" y="292226"/>
+                </a:lnTo>
+                <a:lnTo>
+                  <a:pt x="230199" y="262374"/>
+                </a:lnTo>
+                <a:lnTo>
+                  <a:pt x="232189" y="232189"/>
+                </a:lnTo>
+                <a:lnTo>
+                  <a:pt x="230199" y="202004"/>
+                </a:lnTo>
+                <a:lnTo>
+                  <a:pt x="224228" y="172152"/>
+                </a:lnTo>
+                <a:lnTo>
+                  <a:pt x="214609" y="143294"/>
+                </a:lnTo>
+                <a:lnTo>
+                  <a:pt x="201009" y="116095"/>
+                </a:lnTo>
+                <a:lnTo>
+                  <a:pt x="184093" y="90885"/>
+                </a:lnTo>
+                <a:lnTo>
+                  <a:pt x="164191" y="67998"/>
+                </a:lnTo>
+                <a:lnTo>
+                  <a:pt x="141304" y="48096"/>
+                </a:lnTo>
+                <a:lnTo>
+                  <a:pt x="116095" y="31180"/>
+                </a:lnTo>
+                <a:lnTo>
+                  <a:pt x="88895" y="17580"/>
+                </a:lnTo>
+                <a:lnTo>
+                  <a:pt x="60037" y="7961"/>
+                </a:lnTo>
+                <a:lnTo>
+                  <a:pt x="30185" y="1990"/>
                 </a:lnTo>
                 <a:lnTo>
                   <a:pt x="0" y="0"/>
@@ -11297,76 +11297,76 @@
                   <a:pt x="0" y="0"/>
                 </a:lnTo>
                 <a:lnTo>
-                  <a:pt x="11941" y="1327"/>
-                </a:lnTo>
-                <a:lnTo>
-                  <a:pt x="23551" y="5639"/>
-                </a:lnTo>
-                <a:lnTo>
-                  <a:pt x="34828" y="12605"/>
-                </a:lnTo>
-                <a:lnTo>
-                  <a:pt x="45774" y="22224"/>
-                </a:lnTo>
-                <a:lnTo>
-                  <a:pt x="55394" y="34165"/>
-                </a:lnTo>
-                <a:lnTo>
-                  <a:pt x="64350" y="48428"/>
-                </a:lnTo>
-                <a:lnTo>
-                  <a:pt x="72310" y="65013"/>
-                </a:lnTo>
-                <a:lnTo>
-                  <a:pt x="78944" y="82925"/>
-                </a:lnTo>
-                <a:lnTo>
-                  <a:pt x="84251" y="102495"/>
-                </a:lnTo>
-                <a:lnTo>
-                  <a:pt x="88232" y="123060"/>
-                </a:lnTo>
-                <a:lnTo>
-                  <a:pt x="90554" y="144289"/>
-                </a:lnTo>
-                <a:lnTo>
-                  <a:pt x="91217" y="165849"/>
-                </a:lnTo>
-                <a:lnTo>
-                  <a:pt x="90554" y="187410"/>
-                </a:lnTo>
-                <a:lnTo>
-                  <a:pt x="88232" y="208638"/>
-                </a:lnTo>
-                <a:lnTo>
-                  <a:pt x="84251" y="229204"/>
-                </a:lnTo>
-                <a:lnTo>
-                  <a:pt x="78944" y="248774"/>
-                </a:lnTo>
-                <a:lnTo>
-                  <a:pt x="72310" y="266686"/>
-                </a:lnTo>
-                <a:lnTo>
-                  <a:pt x="64350" y="283271"/>
-                </a:lnTo>
-                <a:lnTo>
-                  <a:pt x="55394" y="297534"/>
-                </a:lnTo>
-                <a:lnTo>
-                  <a:pt x="45774" y="309475"/>
-                </a:lnTo>
-                <a:lnTo>
-                  <a:pt x="34828" y="319094"/>
-                </a:lnTo>
-                <a:lnTo>
-                  <a:pt x="23551" y="326060"/>
-                </a:lnTo>
-                <a:lnTo>
-                  <a:pt x="11941" y="330372"/>
-                </a:lnTo>
-                <a:lnTo>
-                  <a:pt x="0" y="331699"/>
+                  <a:pt x="19570" y="1990"/>
+                </a:lnTo>
+                <a:lnTo>
+                  <a:pt x="39140" y="7961"/>
+                </a:lnTo>
+                <a:lnTo>
+                  <a:pt x="57716" y="17580"/>
+                </a:lnTo>
+                <a:lnTo>
+                  <a:pt x="75627" y="31180"/>
+                </a:lnTo>
+                <a:lnTo>
+                  <a:pt x="91881" y="48096"/>
+                </a:lnTo>
+                <a:lnTo>
+                  <a:pt x="106807" y="67998"/>
+                </a:lnTo>
+                <a:lnTo>
+                  <a:pt x="119743" y="90885"/>
+                </a:lnTo>
+                <a:lnTo>
+                  <a:pt x="130689" y="116095"/>
+                </a:lnTo>
+                <a:lnTo>
+                  <a:pt x="139313" y="143294"/>
+                </a:lnTo>
+                <a:lnTo>
+                  <a:pt x="145616" y="172152"/>
+                </a:lnTo>
+                <a:lnTo>
+                  <a:pt x="149596" y="202004"/>
+                </a:lnTo>
+                <a:lnTo>
+                  <a:pt x="150923" y="232189"/>
+                </a:lnTo>
+                <a:lnTo>
+                  <a:pt x="149596" y="262374"/>
+                </a:lnTo>
+                <a:lnTo>
+                  <a:pt x="145616" y="292226"/>
+                </a:lnTo>
+                <a:lnTo>
+                  <a:pt x="139313" y="321084"/>
+                </a:lnTo>
+                <a:lnTo>
+                  <a:pt x="130689" y="348284"/>
+                </a:lnTo>
+                <a:lnTo>
+                  <a:pt x="119743" y="373493"/>
+                </a:lnTo>
+                <a:lnTo>
+                  <a:pt x="106807" y="396380"/>
+                </a:lnTo>
+                <a:lnTo>
+                  <a:pt x="91881" y="416282"/>
+                </a:lnTo>
+                <a:lnTo>
+                  <a:pt x="75627" y="433198"/>
+                </a:lnTo>
+                <a:lnTo>
+                  <a:pt x="57716" y="446798"/>
+                </a:lnTo>
+                <a:lnTo>
+                  <a:pt x="39140" y="456417"/>
+                </a:lnTo>
+                <a:lnTo>
+                  <a:pt x="19570" y="462388"/>
+                </a:lnTo>
+                <a:lnTo>
+                  <a:pt x="0" y="464378"/>
                 </a:lnTo>
                 <a:close/>
               </a:path>
@@ -11386,8 +11386,8 @@
         </p:nvSpPr>
         <p:spPr>
           <a:xfrm>
-            <a:off x="9226982" y="2107682"/>
-            <a:ext cx="165849" cy="331699"/>
+            <a:off x="9226982" y="2066220"/>
+            <a:ext cx="232189" cy="464378"/>
           </a:xfrm>
           <a:custGeom>
             <a:avLst/>
@@ -11396,78 +11396,78 @@
             <a:cxnLst/>
             <a:rect l="l" t="t" r="r" b="b"/>
             <a:pathLst>
-              <a:path w="165849" h="331699">
+              <a:path w="232189" h="464378">
                 <a:moveTo>
-                  <a:pt x="0" y="331699"/>
+                  <a:pt x="0" y="464378"/>
                 </a:moveTo>
                 <a:lnTo>
-                  <a:pt x="21560" y="330372"/>
-                </a:lnTo>
-                <a:lnTo>
-                  <a:pt x="42789" y="326060"/>
-                </a:lnTo>
-                <a:lnTo>
-                  <a:pt x="63354" y="319094"/>
-                </a:lnTo>
-                <a:lnTo>
-                  <a:pt x="82925" y="309475"/>
-                </a:lnTo>
-                <a:lnTo>
-                  <a:pt x="100836" y="297534"/>
-                </a:lnTo>
-                <a:lnTo>
-                  <a:pt x="117421" y="283271"/>
-                </a:lnTo>
-                <a:lnTo>
-                  <a:pt x="131684" y="266686"/>
-                </a:lnTo>
-                <a:lnTo>
-                  <a:pt x="143625" y="248774"/>
-                </a:lnTo>
-                <a:lnTo>
-                  <a:pt x="153245" y="229204"/>
-                </a:lnTo>
-                <a:lnTo>
-                  <a:pt x="160210" y="208638"/>
-                </a:lnTo>
-                <a:lnTo>
-                  <a:pt x="164523" y="187410"/>
-                </a:lnTo>
-                <a:lnTo>
-                  <a:pt x="165849" y="165849"/>
-                </a:lnTo>
-                <a:lnTo>
-                  <a:pt x="164523" y="144289"/>
-                </a:lnTo>
-                <a:lnTo>
-                  <a:pt x="160210" y="123060"/>
-                </a:lnTo>
-                <a:lnTo>
-                  <a:pt x="153245" y="102495"/>
-                </a:lnTo>
-                <a:lnTo>
-                  <a:pt x="143625" y="82925"/>
-                </a:lnTo>
-                <a:lnTo>
-                  <a:pt x="131684" y="65013"/>
-                </a:lnTo>
-                <a:lnTo>
-                  <a:pt x="117421" y="48428"/>
-                </a:lnTo>
-                <a:lnTo>
-                  <a:pt x="100836" y="34165"/>
-                </a:lnTo>
-                <a:lnTo>
-                  <a:pt x="82925" y="22224"/>
-                </a:lnTo>
-                <a:lnTo>
-                  <a:pt x="63354" y="12605"/>
-                </a:lnTo>
-                <a:lnTo>
-                  <a:pt x="42789" y="5639"/>
-                </a:lnTo>
-                <a:lnTo>
-                  <a:pt x="21560" y="1327"/>
+                  <a:pt x="30185" y="462388"/>
+                </a:lnTo>
+                <a:lnTo>
+                  <a:pt x="60037" y="456417"/>
+                </a:lnTo>
+                <a:lnTo>
+                  <a:pt x="88895" y="446798"/>
+                </a:lnTo>
+                <a:lnTo>
+                  <a:pt x="116095" y="433198"/>
+                </a:lnTo>
+                <a:lnTo>
+                  <a:pt x="141304" y="416282"/>
+                </a:lnTo>
+                <a:lnTo>
+                  <a:pt x="164191" y="396380"/>
+                </a:lnTo>
+                <a:lnTo>
+                  <a:pt x="184093" y="373493"/>
+                </a:lnTo>
+                <a:lnTo>
+                  <a:pt x="201009" y="348284"/>
+                </a:lnTo>
+                <a:lnTo>
+                  <a:pt x="214609" y="321084"/>
+                </a:lnTo>
+                <a:lnTo>
+                  <a:pt x="224228" y="292226"/>
+                </a:lnTo>
+                <a:lnTo>
+                  <a:pt x="230199" y="262374"/>
+                </a:lnTo>
+                <a:lnTo>
+                  <a:pt x="232189" y="232189"/>
+                </a:lnTo>
+                <a:lnTo>
+                  <a:pt x="230199" y="202004"/>
+                </a:lnTo>
+                <a:lnTo>
+                  <a:pt x="224228" y="172152"/>
+                </a:lnTo>
+                <a:lnTo>
+                  <a:pt x="214609" y="143294"/>
+                </a:lnTo>
+                <a:lnTo>
+                  <a:pt x="201009" y="116095"/>
+                </a:lnTo>
+                <a:lnTo>
+                  <a:pt x="184093" y="90885"/>
+                </a:lnTo>
+                <a:lnTo>
+                  <a:pt x="164191" y="67998"/>
+                </a:lnTo>
+                <a:lnTo>
+                  <a:pt x="141304" y="48096"/>
+                </a:lnTo>
+                <a:lnTo>
+                  <a:pt x="116095" y="31180"/>
+                </a:lnTo>
+                <a:lnTo>
+                  <a:pt x="88895" y="17580"/>
+                </a:lnTo>
+                <a:lnTo>
+                  <a:pt x="60037" y="7961"/>
+                </a:lnTo>
+                <a:lnTo>
+                  <a:pt x="30185" y="1990"/>
                 </a:lnTo>
                 <a:lnTo>
                   <a:pt x="0" y="0"/>
@@ -11476,76 +11476,76 @@
                   <a:pt x="0" y="0"/>
                 </a:lnTo>
                 <a:lnTo>
-                  <a:pt x="0" y="1327"/>
-                </a:lnTo>
-                <a:lnTo>
-                  <a:pt x="0" y="5639"/>
-                </a:lnTo>
-                <a:lnTo>
-                  <a:pt x="0" y="12605"/>
-                </a:lnTo>
-                <a:lnTo>
-                  <a:pt x="0" y="22224"/>
-                </a:lnTo>
-                <a:lnTo>
-                  <a:pt x="0" y="34165"/>
-                </a:lnTo>
-                <a:lnTo>
-                  <a:pt x="0" y="48428"/>
-                </a:lnTo>
-                <a:lnTo>
-                  <a:pt x="0" y="65013"/>
-                </a:lnTo>
-                <a:lnTo>
-                  <a:pt x="0" y="82925"/>
-                </a:lnTo>
-                <a:lnTo>
-                  <a:pt x="0" y="102495"/>
-                </a:lnTo>
-                <a:lnTo>
-                  <a:pt x="0" y="123060"/>
-                </a:lnTo>
-                <a:lnTo>
-                  <a:pt x="0" y="144289"/>
-                </a:lnTo>
-                <a:lnTo>
-                  <a:pt x="0" y="165849"/>
-                </a:lnTo>
-                <a:lnTo>
-                  <a:pt x="0" y="187410"/>
-                </a:lnTo>
-                <a:lnTo>
-                  <a:pt x="0" y="208638"/>
-                </a:lnTo>
-                <a:lnTo>
-                  <a:pt x="0" y="229204"/>
-                </a:lnTo>
-                <a:lnTo>
-                  <a:pt x="0" y="248774"/>
-                </a:lnTo>
-                <a:lnTo>
-                  <a:pt x="0" y="266686"/>
-                </a:lnTo>
-                <a:lnTo>
-                  <a:pt x="0" y="283271"/>
-                </a:lnTo>
-                <a:lnTo>
-                  <a:pt x="0" y="297534"/>
-                </a:lnTo>
-                <a:lnTo>
-                  <a:pt x="0" y="309475"/>
-                </a:lnTo>
-                <a:lnTo>
-                  <a:pt x="0" y="319094"/>
-                </a:lnTo>
-                <a:lnTo>
-                  <a:pt x="0" y="326060"/>
-                </a:lnTo>
-                <a:lnTo>
-                  <a:pt x="0" y="330372"/>
-                </a:lnTo>
-                <a:lnTo>
-                  <a:pt x="0" y="331699"/>
+                  <a:pt x="0" y="1990"/>
+                </a:lnTo>
+                <a:lnTo>
+                  <a:pt x="0" y="7961"/>
+                </a:lnTo>
+                <a:lnTo>
+                  <a:pt x="0" y="17580"/>
+                </a:lnTo>
+                <a:lnTo>
+                  <a:pt x="0" y="31180"/>
+                </a:lnTo>
+                <a:lnTo>
+                  <a:pt x="0" y="48096"/>
+                </a:lnTo>
+                <a:lnTo>
+                  <a:pt x="0" y="67998"/>
+                </a:lnTo>
+                <a:lnTo>
+                  <a:pt x="0" y="90885"/>
+                </a:lnTo>
+                <a:lnTo>
+                  <a:pt x="0" y="116095"/>
+                </a:lnTo>
+                <a:lnTo>
+                  <a:pt x="0" y="143294"/>
+                </a:lnTo>
+                <a:lnTo>
+                  <a:pt x="0" y="172152"/>
+                </a:lnTo>
+                <a:lnTo>
+                  <a:pt x="0" y="202004"/>
+                </a:lnTo>
+                <a:lnTo>
+                  <a:pt x="0" y="232189"/>
+                </a:lnTo>
+                <a:lnTo>
+                  <a:pt x="0" y="262374"/>
+                </a:lnTo>
+                <a:lnTo>
+                  <a:pt x="0" y="292226"/>
+                </a:lnTo>
+                <a:lnTo>
+                  <a:pt x="0" y="321084"/>
+                </a:lnTo>
+                <a:lnTo>
+                  <a:pt x="0" y="348284"/>
+                </a:lnTo>
+                <a:lnTo>
+                  <a:pt x="0" y="373493"/>
+                </a:lnTo>
+                <a:lnTo>
+                  <a:pt x="0" y="396380"/>
+                </a:lnTo>
+                <a:lnTo>
+                  <a:pt x="0" y="416282"/>
+                </a:lnTo>
+                <a:lnTo>
+                  <a:pt x="0" y="433198"/>
+                </a:lnTo>
+                <a:lnTo>
+                  <a:pt x="0" y="446798"/>
+                </a:lnTo>
+                <a:lnTo>
+                  <a:pt x="0" y="456417"/>
+                </a:lnTo>
+                <a:lnTo>
+                  <a:pt x="0" y="462388"/>
+                </a:lnTo>
+                <a:lnTo>
+                  <a:pt x="0" y="464378"/>
                 </a:lnTo>
                 <a:close/>
               </a:path>
@@ -11565,8 +11565,8 @@
         </p:nvSpPr>
         <p:spPr>
           <a:xfrm>
-            <a:off x="10719626" y="2704740"/>
-            <a:ext cx="331699" cy="331699"/>
+            <a:off x="10653286" y="2663278"/>
+            <a:ext cx="464378" cy="464378"/>
           </a:xfrm>
           <a:prstGeom prst="ellipse">
             <a:avLst/>
@@ -11588,8 +11588,8 @@
         </p:nvSpPr>
         <p:spPr>
           <a:xfrm>
-            <a:off x="9061133" y="2107682"/>
-            <a:ext cx="331699" cy="331699"/>
+            <a:off x="8994793" y="2066220"/>
+            <a:ext cx="464378" cy="464378"/>
           </a:xfrm>
           <a:prstGeom prst="ellipse">
             <a:avLst/>
@@ -11611,8 +11611,8 @@
         </p:nvSpPr>
         <p:spPr>
           <a:xfrm>
-            <a:off x="7402640" y="2771080"/>
-            <a:ext cx="331699" cy="331699"/>
+            <a:off x="7336300" y="2729617"/>
+            <a:ext cx="464378" cy="464378"/>
           </a:xfrm>
           <a:prstGeom prst="ellipse">
             <a:avLst/>
@@ -11634,7 +11634,7 @@
         </p:nvSpPr>
         <p:spPr>
           <a:xfrm>
-            <a:off x="6905092" y="3334967"/>
+            <a:off x="6905092" y="3393015"/>
             <a:ext cx="4643780" cy="0"/>
           </a:xfrm>
           <a:prstGeom prst="line">
@@ -11657,7 +11657,7 @@
         </p:nvSpPr>
         <p:spPr>
           <a:xfrm flipV="1">
-            <a:off x="8563585" y="3185703"/>
+            <a:off x="8563585" y="3243750"/>
             <a:ext cx="0" cy="149264"/>
           </a:xfrm>
           <a:prstGeom prst="line">
@@ -11680,7 +11680,7 @@
         </p:nvSpPr>
         <p:spPr>
           <a:xfrm>
-            <a:off x="7032574" y="3310317"/>
+            <a:off x="7032574" y="3368364"/>
             <a:ext cx="408432" cy="381000"/>
           </a:xfrm>
           <a:prstGeom prst="rect">
@@ -11719,7 +11719,7 @@
         </p:nvSpPr>
         <p:spPr>
           <a:xfrm>
-            <a:off x="9022766" y="3310317"/>
+            <a:off x="9022766" y="3368364"/>
             <a:ext cx="408432" cy="381000"/>
           </a:xfrm>
           <a:prstGeom prst="rect">
@@ -11758,7 +11758,7 @@
         </p:nvSpPr>
         <p:spPr>
           <a:xfrm>
-            <a:off x="11012957" y="3310317"/>
+            <a:off x="11012957" y="3368364"/>
             <a:ext cx="408432" cy="381000"/>
           </a:xfrm>
           <a:prstGeom prst="rect">
@@ -11797,7 +11797,7 @@
         </p:nvSpPr>
         <p:spPr>
           <a:xfrm>
-            <a:off x="10360076" y="2404663"/>
+            <a:off x="10360076" y="2346616"/>
             <a:ext cx="1050798" cy="301625"/>
           </a:xfrm>
           <a:prstGeom prst="rect">
@@ -11836,7 +11836,7 @@
         </p:nvSpPr>
         <p:spPr>
           <a:xfrm>
-            <a:off x="8701583" y="1807606"/>
+            <a:off x="8701583" y="1749558"/>
             <a:ext cx="1050798" cy="301625"/>
           </a:xfrm>
           <a:prstGeom prst="rect">
@@ -11875,7 +11875,7 @@
         </p:nvSpPr>
         <p:spPr>
           <a:xfrm>
-            <a:off x="6963461" y="2471003"/>
+            <a:off x="6963461" y="2412956"/>
             <a:ext cx="1210056" cy="301625"/>
           </a:xfrm>
           <a:prstGeom prst="rect">
@@ -13807,73 +13807,73 @@
                   <a:pt x="0" y="0"/>
                 </a:lnTo>
                 <a:lnTo>
-                  <a:pt x="45695" y="5612"/>
-                </a:lnTo>
-                <a:lnTo>
-                  <a:pt x="91390" y="21645"/>
-                </a:lnTo>
-                <a:lnTo>
-                  <a:pt x="134680" y="48902"/>
-                </a:lnTo>
-                <a:lnTo>
-                  <a:pt x="176366" y="85778"/>
-                </a:lnTo>
-                <a:lnTo>
-                  <a:pt x="214846" y="132275"/>
-                </a:lnTo>
-                <a:lnTo>
-                  <a:pt x="249318" y="187590"/>
-                </a:lnTo>
-                <a:lnTo>
-                  <a:pt x="279781" y="250921"/>
-                </a:lnTo>
-                <a:lnTo>
-                  <a:pt x="305435" y="320666"/>
-                </a:lnTo>
-                <a:lnTo>
-                  <a:pt x="326278" y="396023"/>
-                </a:lnTo>
-                <a:lnTo>
-                  <a:pt x="340708" y="475388"/>
-                </a:lnTo>
-                <a:lnTo>
-                  <a:pt x="349526" y="557959"/>
-                </a:lnTo>
-                <a:lnTo>
-                  <a:pt x="352733" y="641333"/>
-                </a:lnTo>
-                <a:lnTo>
-                  <a:pt x="349526" y="724706"/>
-                </a:lnTo>
-                <a:lnTo>
-                  <a:pt x="340708" y="807277"/>
-                </a:lnTo>
-                <a:lnTo>
-                  <a:pt x="326278" y="886642"/>
-                </a:lnTo>
-                <a:lnTo>
-                  <a:pt x="305435" y="961999"/>
-                </a:lnTo>
-                <a:lnTo>
-                  <a:pt x="279781" y="1031744"/>
-                </a:lnTo>
-                <a:lnTo>
-                  <a:pt x="249318" y="1095075"/>
-                </a:lnTo>
-                <a:lnTo>
-                  <a:pt x="214846" y="1150390"/>
-                </a:lnTo>
-                <a:lnTo>
-                  <a:pt x="176366" y="1196887"/>
-                </a:lnTo>
-                <a:lnTo>
-                  <a:pt x="134680" y="1233764"/>
-                </a:lnTo>
-                <a:lnTo>
-                  <a:pt x="91390" y="1261020"/>
-                </a:lnTo>
-                <a:lnTo>
-                  <a:pt x="45695" y="1277054"/>
+                  <a:pt x="54513" y="5612"/>
+                </a:lnTo>
+                <a:lnTo>
+                  <a:pt x="108225" y="21645"/>
+                </a:lnTo>
+                <a:lnTo>
+                  <a:pt x="159531" y="48902"/>
+                </a:lnTo>
+                <a:lnTo>
+                  <a:pt x="208433" y="85778"/>
+                </a:lnTo>
+                <a:lnTo>
+                  <a:pt x="254128" y="132275"/>
+                </a:lnTo>
+                <a:lnTo>
+                  <a:pt x="295013" y="187590"/>
+                </a:lnTo>
+                <a:lnTo>
+                  <a:pt x="331088" y="250921"/>
+                </a:lnTo>
+                <a:lnTo>
+                  <a:pt x="360750" y="320666"/>
+                </a:lnTo>
+                <a:lnTo>
+                  <a:pt x="384800" y="396023"/>
+                </a:lnTo>
+                <a:lnTo>
+                  <a:pt x="402436" y="475388"/>
+                </a:lnTo>
+                <a:lnTo>
+                  <a:pt x="413660" y="557959"/>
+                </a:lnTo>
+                <a:lnTo>
+                  <a:pt x="416866" y="641333"/>
+                </a:lnTo>
+                <a:lnTo>
+                  <a:pt x="413660" y="724706"/>
+                </a:lnTo>
+                <a:lnTo>
+                  <a:pt x="402436" y="807277"/>
+                </a:lnTo>
+                <a:lnTo>
+                  <a:pt x="384800" y="886642"/>
+                </a:lnTo>
+                <a:lnTo>
+                  <a:pt x="360750" y="961999"/>
+                </a:lnTo>
+                <a:lnTo>
+                  <a:pt x="331088" y="1031744"/>
+                </a:lnTo>
+                <a:lnTo>
+                  <a:pt x="295013" y="1095075"/>
+                </a:lnTo>
+                <a:lnTo>
+                  <a:pt x="254128" y="1150390"/>
+                </a:lnTo>
+                <a:lnTo>
+                  <a:pt x="208433" y="1196887"/>
+                </a:lnTo>
+                <a:lnTo>
+                  <a:pt x="159531" y="1233764"/>
+                </a:lnTo>
+                <a:lnTo>
+                  <a:pt x="108225" y="1261020"/>
+                </a:lnTo>
+                <a:lnTo>
+                  <a:pt x="54513" y="1277054"/>
                 </a:lnTo>
                 <a:lnTo>
                   <a:pt x="0" y="1282665"/>
@@ -14344,73 +14344,73 @@
                   <a:pt x="641333" y="0"/>
                 </a:lnTo>
                 <a:lnTo>
-                  <a:pt x="595638" y="5612"/>
-                </a:lnTo>
-                <a:lnTo>
-                  <a:pt x="549943" y="21645"/>
-                </a:lnTo>
-                <a:lnTo>
-                  <a:pt x="506653" y="48902"/>
-                </a:lnTo>
-                <a:lnTo>
-                  <a:pt x="464966" y="85778"/>
-                </a:lnTo>
-                <a:lnTo>
-                  <a:pt x="426486" y="132275"/>
-                </a:lnTo>
-                <a:lnTo>
-                  <a:pt x="392015" y="187590"/>
-                </a:lnTo>
-                <a:lnTo>
-                  <a:pt x="361551" y="250921"/>
-                </a:lnTo>
-                <a:lnTo>
-                  <a:pt x="335898" y="320666"/>
-                </a:lnTo>
-                <a:lnTo>
-                  <a:pt x="315055" y="396023"/>
-                </a:lnTo>
-                <a:lnTo>
-                  <a:pt x="300625" y="475388"/>
-                </a:lnTo>
-                <a:lnTo>
-                  <a:pt x="291806" y="557959"/>
-                </a:lnTo>
-                <a:lnTo>
-                  <a:pt x="288600" y="641333"/>
-                </a:lnTo>
-                <a:lnTo>
-                  <a:pt x="291806" y="724706"/>
-                </a:lnTo>
-                <a:lnTo>
-                  <a:pt x="300625" y="807277"/>
-                </a:lnTo>
-                <a:lnTo>
-                  <a:pt x="315055" y="886642"/>
-                </a:lnTo>
-                <a:lnTo>
-                  <a:pt x="335898" y="961999"/>
-                </a:lnTo>
-                <a:lnTo>
-                  <a:pt x="361551" y="1031744"/>
-                </a:lnTo>
-                <a:lnTo>
-                  <a:pt x="392015" y="1095075"/>
-                </a:lnTo>
-                <a:lnTo>
-                  <a:pt x="426486" y="1150390"/>
-                </a:lnTo>
-                <a:lnTo>
-                  <a:pt x="464966" y="1196887"/>
-                </a:lnTo>
-                <a:lnTo>
-                  <a:pt x="506653" y="1233764"/>
-                </a:lnTo>
-                <a:lnTo>
-                  <a:pt x="549943" y="1261020"/>
-                </a:lnTo>
-                <a:lnTo>
-                  <a:pt x="595638" y="1277054"/>
+                  <a:pt x="586819" y="5612"/>
+                </a:lnTo>
+                <a:lnTo>
+                  <a:pt x="533108" y="21645"/>
+                </a:lnTo>
+                <a:lnTo>
+                  <a:pt x="481801" y="48902"/>
+                </a:lnTo>
+                <a:lnTo>
+                  <a:pt x="432900" y="85778"/>
+                </a:lnTo>
+                <a:lnTo>
+                  <a:pt x="387205" y="132275"/>
+                </a:lnTo>
+                <a:lnTo>
+                  <a:pt x="346320" y="187590"/>
+                </a:lnTo>
+                <a:lnTo>
+                  <a:pt x="310245" y="250921"/>
+                </a:lnTo>
+                <a:lnTo>
+                  <a:pt x="280583" y="320666"/>
+                </a:lnTo>
+                <a:lnTo>
+                  <a:pt x="256533" y="396023"/>
+                </a:lnTo>
+                <a:lnTo>
+                  <a:pt x="238896" y="475388"/>
+                </a:lnTo>
+                <a:lnTo>
+                  <a:pt x="227673" y="557959"/>
+                </a:lnTo>
+                <a:lnTo>
+                  <a:pt x="224466" y="641333"/>
+                </a:lnTo>
+                <a:lnTo>
+                  <a:pt x="227673" y="724706"/>
+                </a:lnTo>
+                <a:lnTo>
+                  <a:pt x="238896" y="807277"/>
+                </a:lnTo>
+                <a:lnTo>
+                  <a:pt x="256533" y="886642"/>
+                </a:lnTo>
+                <a:lnTo>
+                  <a:pt x="280583" y="961999"/>
+                </a:lnTo>
+                <a:lnTo>
+                  <a:pt x="310245" y="1031744"/>
+                </a:lnTo>
+                <a:lnTo>
+                  <a:pt x="346320" y="1095075"/>
+                </a:lnTo>
+                <a:lnTo>
+                  <a:pt x="387205" y="1150390"/>
+                </a:lnTo>
+                <a:lnTo>
+                  <a:pt x="432900" y="1196887"/>
+                </a:lnTo>
+                <a:lnTo>
+                  <a:pt x="481801" y="1233764"/>
+                </a:lnTo>
+                <a:lnTo>
+                  <a:pt x="533108" y="1261020"/>
+                </a:lnTo>
+                <a:lnTo>
+                  <a:pt x="586819" y="1277054"/>
                 </a:lnTo>
                 <a:lnTo>
                   <a:pt x="641333" y="1282665"/>
@@ -15583,281 +15583,14 @@
       </p:sp>
       <p:sp>
         <p:nvSpPr>
-          <p:cNvPr id="5" name="S09-card126"/>
+          <p:cNvPr id="5" name="S09-figure126" descr="저녁 7시에 남쪽 하늘을 본 그림. 음력 3일 초승달(서쪽)에서 음력 7일 상현달(남쪽)을 거쳐 음력 15일 보름달(동쪽)로, 오른쪽에서 왼쪽으로 향하는 점선 화살표"/>
           <p:cNvSpPr/>
           <p:nvPr/>
         </p:nvSpPr>
         <p:spPr>
           <a:xfrm>
-            <a:off x="548640" y="3878580"/>
-            <a:ext cx="3544824" cy="1242060"/>
-          </a:xfrm>
-          <a:prstGeom prst="roundRect">
-            <a:avLst>
-              <a:gd name="adj" fmla="val 8834"/>
-            </a:avLst>
-          </a:prstGeom>
-          <a:solidFill>
-            <a:srgbClr val="EAF3F1"/>
-          </a:solidFill>
-          <a:ln w="12700">
-            <a:solidFill>
-              <a:srgbClr val="EAF3F1"/>
-            </a:solidFill>
-            <a:prstDash val="solid"/>
-          </a:ln>
-        </p:spPr>
-      </p:sp>
-      <p:sp>
-        <p:nvSpPr>
-          <p:cNvPr id="6" name="S09-cardtext127"/>
-          <p:cNvSpPr txBox="1"/>
-          <p:nvPr/>
-        </p:nvSpPr>
-        <p:spPr>
-          <a:xfrm>
-            <a:off x="822960" y="4015740"/>
-            <a:ext cx="2996184" cy="967740"/>
-          </a:xfrm>
-          <a:prstGeom prst="rect">
-            <a:avLst/>
-          </a:prstGeom>
-          <a:noFill/>
-          <a:ln/>
-        </p:spPr>
-        <p:txBody>
-          <a:bodyPr wrap="square" lIns="0" tIns="0" rIns="0" bIns="0" rtlCol="0" anchor="ctr"/>
-          <a:lstStyle/>
-          <a:p>
-            <a:pPr eaLnBrk="0" indent="0" marL="0">
-              <a:spcAft>
-                <a:spcPts val="600"/>
-              </a:spcAft>
-              <a:buNone/>
-            </a:pPr>
-            <a:r>
-              <a:rPr lang="ko-KR" altLang="en-US" sz="3000" b="1" dirty="0">
-                <a:solidFill>
-                  <a:srgbClr val="1F2937"/>
-                </a:solidFill>
-                <a:latin typeface="맑은 고딕" pitchFamily="34" charset="0"/>
-                <a:ea typeface="맑은 고딕" pitchFamily="34" charset="-122"/>
-                <a:cs typeface="맑은 고딕" pitchFamily="34" charset="-120"/>
-              </a:rPr>
-              <a:t>음력 3일</a:t>
-            </a:r>
-            <a:endParaRPr lang="ko-KR" sz="3000" dirty="0"/>
-          </a:p>
-          <a:p>
-            <a:pPr eaLnBrk="0" indent="0" marL="0">
-              <a:spcAft>
-                <a:spcPts val="600"/>
-              </a:spcAft>
-              <a:buNone/>
-            </a:pPr>
-            <a:r>
-              <a:rPr lang="ko-KR" altLang="en-US" sz="2400" dirty="0">
-                <a:solidFill>
-                  <a:srgbClr val="1F2937"/>
-                </a:solidFill>
-                <a:latin typeface="맑은 고딕" pitchFamily="34" charset="0"/>
-                <a:ea typeface="맑은 고딕" pitchFamily="34" charset="-122"/>
-                <a:cs typeface="맑은 고딕" pitchFamily="34" charset="-120"/>
-              </a:rPr>
-              <a:t>서쪽 하늘, 초승달</a:t>
-            </a:r>
-            <a:endParaRPr lang="ko-KR" sz="3000" dirty="0"/>
-          </a:p>
-        </p:txBody>
-      </p:sp>
-      <p:sp>
-        <p:nvSpPr>
-          <p:cNvPr id="7" name="S09-card128"/>
-          <p:cNvSpPr/>
-          <p:nvPr/>
-        </p:nvSpPr>
-        <p:spPr>
-          <a:xfrm>
-            <a:off x="4322064" y="3878580"/>
-            <a:ext cx="3544824" cy="1242060"/>
-          </a:xfrm>
-          <a:prstGeom prst="roundRect">
-            <a:avLst>
-              <a:gd name="adj" fmla="val 8834"/>
-            </a:avLst>
-          </a:prstGeom>
-          <a:solidFill>
-            <a:srgbClr val="EAF3F1"/>
-          </a:solidFill>
-          <a:ln w="12700">
-            <a:solidFill>
-              <a:srgbClr val="EAF3F1"/>
-            </a:solidFill>
-            <a:prstDash val="solid"/>
-          </a:ln>
-        </p:spPr>
-      </p:sp>
-      <p:sp>
-        <p:nvSpPr>
-          <p:cNvPr id="8" name="S09-cardtext129"/>
-          <p:cNvSpPr txBox="1"/>
-          <p:nvPr/>
-        </p:nvSpPr>
-        <p:spPr>
-          <a:xfrm>
-            <a:off x="4596384" y="4015740"/>
-            <a:ext cx="2996184" cy="967740"/>
-          </a:xfrm>
-          <a:prstGeom prst="rect">
-            <a:avLst/>
-          </a:prstGeom>
-          <a:noFill/>
-          <a:ln/>
-        </p:spPr>
-        <p:txBody>
-          <a:bodyPr wrap="square" lIns="0" tIns="0" rIns="0" bIns="0" rtlCol="0" anchor="ctr"/>
-          <a:lstStyle/>
-          <a:p>
-            <a:pPr eaLnBrk="0" indent="0" marL="0">
-              <a:spcAft>
-                <a:spcPts val="600"/>
-              </a:spcAft>
-              <a:buNone/>
-            </a:pPr>
-            <a:r>
-              <a:rPr lang="ko-KR" altLang="en-US" sz="3000" b="1" dirty="0">
-                <a:solidFill>
-                  <a:srgbClr val="1F2937"/>
-                </a:solidFill>
-                <a:latin typeface="맑은 고딕" pitchFamily="34" charset="0"/>
-                <a:ea typeface="맑은 고딕" pitchFamily="34" charset="-122"/>
-                <a:cs typeface="맑은 고딕" pitchFamily="34" charset="-120"/>
-              </a:rPr>
-              <a:t>음력 7일</a:t>
-            </a:r>
-            <a:endParaRPr lang="ko-KR" sz="3000" dirty="0"/>
-          </a:p>
-          <a:p>
-            <a:pPr eaLnBrk="0" indent="0" marL="0">
-              <a:spcAft>
-                <a:spcPts val="600"/>
-              </a:spcAft>
-              <a:buNone/>
-            </a:pPr>
-            <a:r>
-              <a:rPr lang="ko-KR" altLang="en-US" sz="2400" dirty="0">
-                <a:solidFill>
-                  <a:srgbClr val="1F2937"/>
-                </a:solidFill>
-                <a:latin typeface="맑은 고딕" pitchFamily="34" charset="0"/>
-                <a:ea typeface="맑은 고딕" pitchFamily="34" charset="-122"/>
-                <a:cs typeface="맑은 고딕" pitchFamily="34" charset="-120"/>
-              </a:rPr>
-              <a:t>남쪽 하늘, 상현달</a:t>
-            </a:r>
-            <a:endParaRPr lang="ko-KR" sz="3000" dirty="0"/>
-          </a:p>
-        </p:txBody>
-      </p:sp>
-      <p:sp>
-        <p:nvSpPr>
-          <p:cNvPr id="9" name="S09-card130"/>
-          <p:cNvSpPr/>
-          <p:nvPr/>
-        </p:nvSpPr>
-        <p:spPr>
-          <a:xfrm>
-            <a:off x="8095488" y="3878580"/>
-            <a:ext cx="3544824" cy="1242060"/>
-          </a:xfrm>
-          <a:prstGeom prst="roundRect">
-            <a:avLst>
-              <a:gd name="adj" fmla="val 8834"/>
-            </a:avLst>
-          </a:prstGeom>
-          <a:solidFill>
-            <a:srgbClr val="EAF3F1"/>
-          </a:solidFill>
-          <a:ln w="12700">
-            <a:solidFill>
-              <a:srgbClr val="EAF3F1"/>
-            </a:solidFill>
-            <a:prstDash val="solid"/>
-          </a:ln>
-        </p:spPr>
-      </p:sp>
-      <p:sp>
-        <p:nvSpPr>
-          <p:cNvPr id="10" name="S09-cardtext131"/>
-          <p:cNvSpPr txBox="1"/>
-          <p:nvPr/>
-        </p:nvSpPr>
-        <p:spPr>
-          <a:xfrm>
-            <a:off x="8369808" y="4015740"/>
-            <a:ext cx="2996184" cy="967740"/>
-          </a:xfrm>
-          <a:prstGeom prst="rect">
-            <a:avLst/>
-          </a:prstGeom>
-          <a:noFill/>
-          <a:ln/>
-        </p:spPr>
-        <p:txBody>
-          <a:bodyPr wrap="square" lIns="0" tIns="0" rIns="0" bIns="0" rtlCol="0" anchor="ctr"/>
-          <a:lstStyle/>
-          <a:p>
-            <a:pPr eaLnBrk="0" indent="0" marL="0">
-              <a:spcAft>
-                <a:spcPts val="600"/>
-              </a:spcAft>
-              <a:buNone/>
-            </a:pPr>
-            <a:r>
-              <a:rPr lang="ko-KR" altLang="en-US" sz="3000" b="1" dirty="0">
-                <a:solidFill>
-                  <a:srgbClr val="1F2937"/>
-                </a:solidFill>
-                <a:latin typeface="맑은 고딕" pitchFamily="34" charset="0"/>
-                <a:ea typeface="맑은 고딕" pitchFamily="34" charset="-122"/>
-                <a:cs typeface="맑은 고딕" pitchFamily="34" charset="-120"/>
-              </a:rPr>
-              <a:t>음력 15일</a:t>
-            </a:r>
-            <a:endParaRPr lang="ko-KR" sz="3000" dirty="0"/>
-          </a:p>
-          <a:p>
-            <a:pPr eaLnBrk="0" indent="0" marL="0">
-              <a:spcAft>
-                <a:spcPts val="600"/>
-              </a:spcAft>
-              <a:buNone/>
-            </a:pPr>
-            <a:r>
-              <a:rPr lang="ko-KR" altLang="en-US" sz="2400" dirty="0">
-                <a:solidFill>
-                  <a:srgbClr val="1F2937"/>
-                </a:solidFill>
-                <a:latin typeface="맑은 고딕" pitchFamily="34" charset="0"/>
-                <a:ea typeface="맑은 고딕" pitchFamily="34" charset="-122"/>
-                <a:cs typeface="맑은 고딕" pitchFamily="34" charset="-120"/>
-              </a:rPr>
-              <a:t>동쪽 하늘, 보름달</a:t>
-            </a:r>
-            <a:endParaRPr lang="ko-KR" sz="3000" dirty="0"/>
-          </a:p>
-        </p:txBody>
-      </p:sp>
-      <p:sp>
-        <p:nvSpPr>
-          <p:cNvPr id="11" name="S09-figure132" descr="저녁 7시에 남쪽 하늘을 본 그림. 음력 3일 초승달(서쪽)에서 음력 7일 상현달(남쪽)을 거쳐 음력 15일 보름달(동쪽)로, 오른쪽에서 왼쪽으로 향하는 점선 화살표"/>
-          <p:cNvSpPr/>
-          <p:nvPr/>
-        </p:nvSpPr>
-        <p:spPr>
-          <a:xfrm>
-            <a:off x="7965445" y="2352804"/>
-            <a:ext cx="415771" cy="415771"/>
+            <a:off x="8918309" y="2927743"/>
+            <a:ext cx="919388" cy="919388"/>
           </a:xfrm>
           <a:prstGeom prst="ellipse">
             <a:avLst/>
@@ -15875,14 +15608,14 @@
       </p:sp>
       <p:sp>
         <p:nvSpPr>
-          <p:cNvPr id="12" name="S09-mark133"/>
+          <p:cNvPr id="6" name="S09-mark127"/>
           <p:cNvSpPr/>
           <p:nvPr/>
         </p:nvSpPr>
         <p:spPr>
           <a:xfrm>
-            <a:off x="5886591" y="1604417"/>
-            <a:ext cx="415771" cy="415771"/>
+            <a:off x="5634782" y="1745673"/>
+            <a:ext cx="919388" cy="919388"/>
           </a:xfrm>
           <a:prstGeom prst="ellipse">
             <a:avLst/>
@@ -15900,14 +15633,14 @@
       </p:sp>
       <p:sp>
         <p:nvSpPr>
-          <p:cNvPr id="13" name="S09-mark134"/>
+          <p:cNvPr id="7" name="S09-mark128"/>
           <p:cNvSpPr/>
           <p:nvPr/>
         </p:nvSpPr>
         <p:spPr>
           <a:xfrm>
-            <a:off x="3807736" y="2435959"/>
-            <a:ext cx="415771" cy="415771"/>
+            <a:off x="2351255" y="3059084"/>
+            <a:ext cx="919388" cy="919388"/>
           </a:xfrm>
           <a:prstGeom prst="ellipse">
             <a:avLst/>
@@ -15925,14 +15658,14 @@
       </p:sp>
       <p:sp>
         <p:nvSpPr>
-          <p:cNvPr id="14" name="S09-mark135"/>
+          <p:cNvPr id="8" name="S09-mark129"/>
           <p:cNvSpPr/>
           <p:nvPr/>
         </p:nvSpPr>
         <p:spPr>
           <a:xfrm>
-            <a:off x="3184080" y="3142769"/>
-            <a:ext cx="5820792" cy="415771"/>
+            <a:off x="1497538" y="4372495"/>
+            <a:ext cx="9193876" cy="656705"/>
           </a:xfrm>
           <a:custGeom>
             <a:avLst/>
@@ -15941,15 +15674,15 @@
             <a:cxnLst/>
             <a:rect l="l" t="t" r="r" b="b"/>
             <a:pathLst>
-              <a:path w="5820792" h="415771">
+              <a:path w="9193876" h="656705">
                 <a:moveTo>
-                  <a:pt x="0" y="415771"/>
+                  <a:pt x="0" y="656705"/>
                 </a:moveTo>
                 <a:lnTo>
-                  <a:pt x="5820792" y="415771"/>
-                </a:lnTo>
-                <a:lnTo>
-                  <a:pt x="5820792" y="0"/>
+                  <a:pt x="9193876" y="656705"/>
+                </a:lnTo>
+                <a:lnTo>
+                  <a:pt x="9193876" y="0"/>
                 </a:lnTo>
                 <a:lnTo>
                   <a:pt x="0" y="0"/>
@@ -15966,14 +15699,14 @@
       </p:sp>
       <p:sp>
         <p:nvSpPr>
-          <p:cNvPr id="15" name="S09-mark136"/>
+          <p:cNvPr id="9" name="S09-mark130"/>
           <p:cNvSpPr/>
           <p:nvPr/>
         </p:nvSpPr>
         <p:spPr>
           <a:xfrm>
-            <a:off x="6926018" y="2602267"/>
-            <a:ext cx="415771" cy="540502"/>
+            <a:off x="7407887" y="3518777"/>
+            <a:ext cx="656705" cy="853717"/>
           </a:xfrm>
           <a:custGeom>
             <a:avLst/>
@@ -15982,15 +15715,15 @@
             <a:cxnLst/>
             <a:rect l="l" t="t" r="r" b="b"/>
             <a:pathLst>
-              <a:path w="415771" h="540502">
+              <a:path w="656705" h="853717">
                 <a:moveTo>
-                  <a:pt x="0" y="540502"/>
+                  <a:pt x="0" y="853717"/>
                 </a:moveTo>
                 <a:lnTo>
-                  <a:pt x="415771" y="540502"/>
-                </a:lnTo>
-                <a:lnTo>
-                  <a:pt x="415771" y="0"/>
+                  <a:pt x="656705" y="853717"/>
+                </a:lnTo>
+                <a:lnTo>
+                  <a:pt x="656705" y="0"/>
                 </a:lnTo>
                 <a:lnTo>
                   <a:pt x="0" y="0"/>
@@ -16012,14 +15745,14 @@
       </p:sp>
       <p:sp>
         <p:nvSpPr>
-          <p:cNvPr id="16" name="S09-mark137"/>
+          <p:cNvPr id="10" name="S09-mark131"/>
           <p:cNvSpPr/>
           <p:nvPr/>
         </p:nvSpPr>
         <p:spPr>
           <a:xfrm>
-            <a:off x="5013472" y="2435959"/>
-            <a:ext cx="498925" cy="519714"/>
+            <a:off x="4387042" y="3256095"/>
+            <a:ext cx="788047" cy="820882"/>
           </a:xfrm>
           <a:custGeom>
             <a:avLst/>
@@ -16028,15 +15761,15 @@
             <a:cxnLst/>
             <a:rect l="l" t="t" r="r" b="b"/>
             <a:pathLst>
-              <a:path w="498925" h="519714">
+              <a:path w="788047" h="820882">
                 <a:moveTo>
-                  <a:pt x="0" y="519714"/>
+                  <a:pt x="0" y="820882"/>
                 </a:moveTo>
                 <a:lnTo>
-                  <a:pt x="249463" y="0"/>
-                </a:lnTo>
-                <a:lnTo>
-                  <a:pt x="498925" y="519714"/>
+                  <a:pt x="394023" y="0"/>
+                </a:lnTo>
+                <a:lnTo>
+                  <a:pt x="788047" y="820882"/>
                 </a:lnTo>
                 <a:close/>
               </a:path>
@@ -16055,14 +15788,14 @@
       </p:sp>
       <p:sp>
         <p:nvSpPr>
-          <p:cNvPr id="17" name="S09-mark138"/>
+          <p:cNvPr id="11" name="S09-mark132"/>
           <p:cNvSpPr/>
           <p:nvPr/>
         </p:nvSpPr>
         <p:spPr>
           <a:xfrm>
-            <a:off x="8173330" y="2352804"/>
-            <a:ext cx="207885" cy="415771"/>
+            <a:off x="9378003" y="2927743"/>
+            <a:ext cx="459694" cy="919388"/>
           </a:xfrm>
           <a:custGeom>
             <a:avLst/>
@@ -16071,78 +15804,78 @@
             <a:cxnLst/>
             <a:rect l="l" t="t" r="r" b="b"/>
             <a:pathLst>
-              <a:path w="207885" h="415771">
+              <a:path w="459694" h="919388">
                 <a:moveTo>
-                  <a:pt x="0" y="415771"/>
+                  <a:pt x="0" y="919388"/>
                 </a:moveTo>
                 <a:lnTo>
-                  <a:pt x="27025" y="414108"/>
-                </a:lnTo>
-                <a:lnTo>
-                  <a:pt x="53634" y="408703"/>
-                </a:lnTo>
-                <a:lnTo>
-                  <a:pt x="79412" y="399972"/>
-                </a:lnTo>
-                <a:lnTo>
-                  <a:pt x="103943" y="387914"/>
-                </a:lnTo>
-                <a:lnTo>
-                  <a:pt x="126394" y="372946"/>
-                </a:lnTo>
-                <a:lnTo>
-                  <a:pt x="147183" y="355068"/>
-                </a:lnTo>
-                <a:lnTo>
-                  <a:pt x="165061" y="334280"/>
-                </a:lnTo>
-                <a:lnTo>
-                  <a:pt x="180029" y="311828"/>
-                </a:lnTo>
-                <a:lnTo>
-                  <a:pt x="192086" y="287298"/>
-                </a:lnTo>
-                <a:lnTo>
-                  <a:pt x="200817" y="261520"/>
-                </a:lnTo>
-                <a:lnTo>
-                  <a:pt x="206222" y="234911"/>
-                </a:lnTo>
-                <a:lnTo>
-                  <a:pt x="207885" y="207885"/>
-                </a:lnTo>
-                <a:lnTo>
-                  <a:pt x="206222" y="180860"/>
-                </a:lnTo>
-                <a:lnTo>
-                  <a:pt x="200817" y="154251"/>
-                </a:lnTo>
-                <a:lnTo>
-                  <a:pt x="192086" y="128473"/>
-                </a:lnTo>
-                <a:lnTo>
-                  <a:pt x="180029" y="103943"/>
-                </a:lnTo>
-                <a:lnTo>
-                  <a:pt x="165061" y="81491"/>
-                </a:lnTo>
-                <a:lnTo>
-                  <a:pt x="147183" y="60703"/>
-                </a:lnTo>
-                <a:lnTo>
-                  <a:pt x="126394" y="42824"/>
-                </a:lnTo>
-                <a:lnTo>
-                  <a:pt x="103943" y="27857"/>
-                </a:lnTo>
-                <a:lnTo>
-                  <a:pt x="79412" y="15799"/>
-                </a:lnTo>
-                <a:lnTo>
-                  <a:pt x="53634" y="7068"/>
-                </a:lnTo>
-                <a:lnTo>
-                  <a:pt x="27025" y="1663"/>
+                  <a:pt x="59760" y="915447"/>
+                </a:lnTo>
+                <a:lnTo>
+                  <a:pt x="118864" y="903627"/>
+                </a:lnTo>
+                <a:lnTo>
+                  <a:pt x="175997" y="884582"/>
+                </a:lnTo>
+                <a:lnTo>
+                  <a:pt x="229847" y="857657"/>
+                </a:lnTo>
+                <a:lnTo>
+                  <a:pt x="279757" y="824165"/>
+                </a:lnTo>
+                <a:lnTo>
+                  <a:pt x="325069" y="784763"/>
+                </a:lnTo>
+                <a:lnTo>
+                  <a:pt x="364472" y="739450"/>
+                </a:lnTo>
+                <a:lnTo>
+                  <a:pt x="397964" y="689541"/>
+                </a:lnTo>
+                <a:lnTo>
+                  <a:pt x="424888" y="635691"/>
+                </a:lnTo>
+                <a:lnTo>
+                  <a:pt x="443933" y="578558"/>
+                </a:lnTo>
+                <a:lnTo>
+                  <a:pt x="455754" y="519454"/>
+                </a:lnTo>
+                <a:lnTo>
+                  <a:pt x="459694" y="459694"/>
+                </a:lnTo>
+                <a:lnTo>
+                  <a:pt x="455754" y="399934"/>
+                </a:lnTo>
+                <a:lnTo>
+                  <a:pt x="443933" y="340830"/>
+                </a:lnTo>
+                <a:lnTo>
+                  <a:pt x="424888" y="283697"/>
+                </a:lnTo>
+                <a:lnTo>
+                  <a:pt x="397964" y="229847"/>
+                </a:lnTo>
+                <a:lnTo>
+                  <a:pt x="364472" y="179937"/>
+                </a:lnTo>
+                <a:lnTo>
+                  <a:pt x="325069" y="134625"/>
+                </a:lnTo>
+                <a:lnTo>
+                  <a:pt x="279757" y="95222"/>
+                </a:lnTo>
+                <a:lnTo>
+                  <a:pt x="229847" y="61730"/>
+                </a:lnTo>
+                <a:lnTo>
+                  <a:pt x="175997" y="34805"/>
+                </a:lnTo>
+                <a:lnTo>
+                  <a:pt x="118864" y="15761"/>
+                </a:lnTo>
+                <a:lnTo>
+                  <a:pt x="59760" y="3940"/>
                 </a:lnTo>
                 <a:lnTo>
                   <a:pt x="0" y="0"/>
@@ -16151,76 +15884,76 @@
                   <a:pt x="0" y="0"/>
                 </a:lnTo>
                 <a:lnTo>
-                  <a:pt x="14968" y="1663"/>
-                </a:lnTo>
-                <a:lnTo>
-                  <a:pt x="29520" y="7068"/>
-                </a:lnTo>
-                <a:lnTo>
-                  <a:pt x="43656" y="15799"/>
-                </a:lnTo>
-                <a:lnTo>
-                  <a:pt x="57376" y="27857"/>
-                </a:lnTo>
-                <a:lnTo>
-                  <a:pt x="69434" y="42824"/>
-                </a:lnTo>
-                <a:lnTo>
-                  <a:pt x="80660" y="60703"/>
-                </a:lnTo>
-                <a:lnTo>
-                  <a:pt x="90638" y="81491"/>
-                </a:lnTo>
-                <a:lnTo>
-                  <a:pt x="98953" y="103943"/>
-                </a:lnTo>
-                <a:lnTo>
-                  <a:pt x="105606" y="128473"/>
-                </a:lnTo>
-                <a:lnTo>
-                  <a:pt x="110595" y="154251"/>
-                </a:lnTo>
-                <a:lnTo>
-                  <a:pt x="113505" y="180860"/>
-                </a:lnTo>
-                <a:lnTo>
-                  <a:pt x="114337" y="207885"/>
-                </a:lnTo>
-                <a:lnTo>
-                  <a:pt x="113505" y="234911"/>
-                </a:lnTo>
-                <a:lnTo>
-                  <a:pt x="110595" y="261520"/>
-                </a:lnTo>
-                <a:lnTo>
-                  <a:pt x="105606" y="287298"/>
-                </a:lnTo>
-                <a:lnTo>
-                  <a:pt x="98953" y="311828"/>
-                </a:lnTo>
-                <a:lnTo>
-                  <a:pt x="90638" y="334280"/>
-                </a:lnTo>
-                <a:lnTo>
-                  <a:pt x="80660" y="355068"/>
-                </a:lnTo>
-                <a:lnTo>
-                  <a:pt x="69434" y="372946"/>
-                </a:lnTo>
-                <a:lnTo>
-                  <a:pt x="57376" y="387914"/>
-                </a:lnTo>
-                <a:lnTo>
-                  <a:pt x="43656" y="399972"/>
-                </a:lnTo>
-                <a:lnTo>
-                  <a:pt x="29520" y="408703"/>
-                </a:lnTo>
-                <a:lnTo>
-                  <a:pt x="14968" y="414108"/>
-                </a:lnTo>
-                <a:lnTo>
-                  <a:pt x="0" y="415771"/>
+                  <a:pt x="38746" y="3940"/>
+                </a:lnTo>
+                <a:lnTo>
+                  <a:pt x="77491" y="15761"/>
+                </a:lnTo>
+                <a:lnTo>
+                  <a:pt x="114267" y="34805"/>
+                </a:lnTo>
+                <a:lnTo>
+                  <a:pt x="149729" y="61730"/>
+                </a:lnTo>
+                <a:lnTo>
+                  <a:pt x="181907" y="95222"/>
+                </a:lnTo>
+                <a:lnTo>
+                  <a:pt x="211459" y="134625"/>
+                </a:lnTo>
+                <a:lnTo>
+                  <a:pt x="237071" y="179937"/>
+                </a:lnTo>
+                <a:lnTo>
+                  <a:pt x="258742" y="229847"/>
+                </a:lnTo>
+                <a:lnTo>
+                  <a:pt x="275816" y="283697"/>
+                </a:lnTo>
+                <a:lnTo>
+                  <a:pt x="288294" y="340830"/>
+                </a:lnTo>
+                <a:lnTo>
+                  <a:pt x="296174" y="399934"/>
+                </a:lnTo>
+                <a:lnTo>
+                  <a:pt x="298801" y="459694"/>
+                </a:lnTo>
+                <a:lnTo>
+                  <a:pt x="296174" y="519454"/>
+                </a:lnTo>
+                <a:lnTo>
+                  <a:pt x="288294" y="578558"/>
+                </a:lnTo>
+                <a:lnTo>
+                  <a:pt x="275816" y="635691"/>
+                </a:lnTo>
+                <a:lnTo>
+                  <a:pt x="258742" y="689541"/>
+                </a:lnTo>
+                <a:lnTo>
+                  <a:pt x="237071" y="739450"/>
+                </a:lnTo>
+                <a:lnTo>
+                  <a:pt x="211459" y="784763"/>
+                </a:lnTo>
+                <a:lnTo>
+                  <a:pt x="181907" y="824165"/>
+                </a:lnTo>
+                <a:lnTo>
+                  <a:pt x="149729" y="857657"/>
+                </a:lnTo>
+                <a:lnTo>
+                  <a:pt x="114267" y="884582"/>
+                </a:lnTo>
+                <a:lnTo>
+                  <a:pt x="77491" y="903627"/>
+                </a:lnTo>
+                <a:lnTo>
+                  <a:pt x="38746" y="915447"/>
+                </a:lnTo>
+                <a:lnTo>
+                  <a:pt x="0" y="919388"/>
                 </a:lnTo>
                 <a:close/>
               </a:path>
@@ -16234,14 +15967,14 @@
       </p:sp>
       <p:sp>
         <p:nvSpPr>
-          <p:cNvPr id="18" name="S09-mark139"/>
+          <p:cNvPr id="12" name="S09-mark133"/>
           <p:cNvSpPr/>
           <p:nvPr/>
         </p:nvSpPr>
         <p:spPr>
           <a:xfrm>
-            <a:off x="6094476" y="1604417"/>
-            <a:ext cx="207885" cy="415771"/>
+            <a:off x="6094476" y="1745673"/>
+            <a:ext cx="459694" cy="919388"/>
           </a:xfrm>
           <a:custGeom>
             <a:avLst/>
@@ -16250,78 +15983,78 @@
             <a:cxnLst/>
             <a:rect l="l" t="t" r="r" b="b"/>
             <a:pathLst>
-              <a:path w="207885" h="415771">
+              <a:path w="459694" h="919388">
                 <a:moveTo>
-                  <a:pt x="0" y="415771"/>
+                  <a:pt x="0" y="919388"/>
                 </a:moveTo>
                 <a:lnTo>
-                  <a:pt x="27025" y="414108"/>
-                </a:lnTo>
-                <a:lnTo>
-                  <a:pt x="53634" y="408703"/>
-                </a:lnTo>
-                <a:lnTo>
-                  <a:pt x="79412" y="399972"/>
-                </a:lnTo>
-                <a:lnTo>
-                  <a:pt x="103943" y="387914"/>
-                </a:lnTo>
-                <a:lnTo>
-                  <a:pt x="126394" y="372946"/>
-                </a:lnTo>
-                <a:lnTo>
-                  <a:pt x="147183" y="355068"/>
-                </a:lnTo>
-                <a:lnTo>
-                  <a:pt x="165061" y="334280"/>
-                </a:lnTo>
-                <a:lnTo>
-                  <a:pt x="180029" y="311828"/>
-                </a:lnTo>
-                <a:lnTo>
-                  <a:pt x="192086" y="287298"/>
-                </a:lnTo>
-                <a:lnTo>
-                  <a:pt x="200817" y="261520"/>
-                </a:lnTo>
-                <a:lnTo>
-                  <a:pt x="206222" y="234911"/>
-                </a:lnTo>
-                <a:lnTo>
-                  <a:pt x="207885" y="207885"/>
-                </a:lnTo>
-                <a:lnTo>
-                  <a:pt x="206222" y="180860"/>
-                </a:lnTo>
-                <a:lnTo>
-                  <a:pt x="200817" y="154251"/>
-                </a:lnTo>
-                <a:lnTo>
-                  <a:pt x="192086" y="128473"/>
-                </a:lnTo>
-                <a:lnTo>
-                  <a:pt x="180029" y="103943"/>
-                </a:lnTo>
-                <a:lnTo>
-                  <a:pt x="165061" y="81491"/>
-                </a:lnTo>
-                <a:lnTo>
-                  <a:pt x="147183" y="60703"/>
-                </a:lnTo>
-                <a:lnTo>
-                  <a:pt x="126394" y="42824"/>
-                </a:lnTo>
-                <a:lnTo>
-                  <a:pt x="103943" y="27857"/>
-                </a:lnTo>
-                <a:lnTo>
-                  <a:pt x="79412" y="15799"/>
-                </a:lnTo>
-                <a:lnTo>
-                  <a:pt x="53634" y="7068"/>
-                </a:lnTo>
-                <a:lnTo>
-                  <a:pt x="27025" y="1663"/>
+                  <a:pt x="59760" y="915447"/>
+                </a:lnTo>
+                <a:lnTo>
+                  <a:pt x="118864" y="903627"/>
+                </a:lnTo>
+                <a:lnTo>
+                  <a:pt x="175997" y="884582"/>
+                </a:lnTo>
+                <a:lnTo>
+                  <a:pt x="229847" y="857657"/>
+                </a:lnTo>
+                <a:lnTo>
+                  <a:pt x="279757" y="824165"/>
+                </a:lnTo>
+                <a:lnTo>
+                  <a:pt x="325069" y="784763"/>
+                </a:lnTo>
+                <a:lnTo>
+                  <a:pt x="364472" y="739450"/>
+                </a:lnTo>
+                <a:lnTo>
+                  <a:pt x="397964" y="689541"/>
+                </a:lnTo>
+                <a:lnTo>
+                  <a:pt x="424888" y="635691"/>
+                </a:lnTo>
+                <a:lnTo>
+                  <a:pt x="443933" y="578558"/>
+                </a:lnTo>
+                <a:lnTo>
+                  <a:pt x="455754" y="519454"/>
+                </a:lnTo>
+                <a:lnTo>
+                  <a:pt x="459694" y="459694"/>
+                </a:lnTo>
+                <a:lnTo>
+                  <a:pt x="455754" y="399934"/>
+                </a:lnTo>
+                <a:lnTo>
+                  <a:pt x="443933" y="340830"/>
+                </a:lnTo>
+                <a:lnTo>
+                  <a:pt x="424888" y="283697"/>
+                </a:lnTo>
+                <a:lnTo>
+                  <a:pt x="397964" y="229847"/>
+                </a:lnTo>
+                <a:lnTo>
+                  <a:pt x="364472" y="179937"/>
+                </a:lnTo>
+                <a:lnTo>
+                  <a:pt x="325069" y="134625"/>
+                </a:lnTo>
+                <a:lnTo>
+                  <a:pt x="279757" y="95222"/>
+                </a:lnTo>
+                <a:lnTo>
+                  <a:pt x="229847" y="61730"/>
+                </a:lnTo>
+                <a:lnTo>
+                  <a:pt x="175997" y="34805"/>
+                </a:lnTo>
+                <a:lnTo>
+                  <a:pt x="118864" y="15761"/>
+                </a:lnTo>
+                <a:lnTo>
+                  <a:pt x="59760" y="3940"/>
                 </a:lnTo>
                 <a:lnTo>
                   <a:pt x="0" y="0"/>
@@ -16330,76 +16063,76 @@
                   <a:pt x="0" y="0"/>
                 </a:lnTo>
                 <a:lnTo>
-                  <a:pt x="0" y="1663"/>
-                </a:lnTo>
-                <a:lnTo>
-                  <a:pt x="0" y="7068"/>
-                </a:lnTo>
-                <a:lnTo>
-                  <a:pt x="0" y="15799"/>
-                </a:lnTo>
-                <a:lnTo>
-                  <a:pt x="0" y="27857"/>
-                </a:lnTo>
-                <a:lnTo>
-                  <a:pt x="0" y="42824"/>
-                </a:lnTo>
-                <a:lnTo>
-                  <a:pt x="0" y="60703"/>
-                </a:lnTo>
-                <a:lnTo>
-                  <a:pt x="0" y="81491"/>
-                </a:lnTo>
-                <a:lnTo>
-                  <a:pt x="0" y="103943"/>
-                </a:lnTo>
-                <a:lnTo>
-                  <a:pt x="0" y="128473"/>
-                </a:lnTo>
-                <a:lnTo>
-                  <a:pt x="0" y="154251"/>
-                </a:lnTo>
-                <a:lnTo>
-                  <a:pt x="0" y="180860"/>
-                </a:lnTo>
-                <a:lnTo>
-                  <a:pt x="0" y="207885"/>
-                </a:lnTo>
-                <a:lnTo>
-                  <a:pt x="0" y="234911"/>
-                </a:lnTo>
-                <a:lnTo>
-                  <a:pt x="0" y="261520"/>
-                </a:lnTo>
-                <a:lnTo>
-                  <a:pt x="0" y="287298"/>
-                </a:lnTo>
-                <a:lnTo>
-                  <a:pt x="0" y="311828"/>
-                </a:lnTo>
-                <a:lnTo>
-                  <a:pt x="0" y="334280"/>
-                </a:lnTo>
-                <a:lnTo>
-                  <a:pt x="0" y="355068"/>
-                </a:lnTo>
-                <a:lnTo>
-                  <a:pt x="0" y="372946"/>
-                </a:lnTo>
-                <a:lnTo>
-                  <a:pt x="0" y="387914"/>
-                </a:lnTo>
-                <a:lnTo>
-                  <a:pt x="0" y="399972"/>
-                </a:lnTo>
-                <a:lnTo>
-                  <a:pt x="0" y="408703"/>
-                </a:lnTo>
-                <a:lnTo>
-                  <a:pt x="0" y="414108"/>
-                </a:lnTo>
-                <a:lnTo>
-                  <a:pt x="0" y="415771"/>
+                  <a:pt x="0" y="3940"/>
+                </a:lnTo>
+                <a:lnTo>
+                  <a:pt x="0" y="15761"/>
+                </a:lnTo>
+                <a:lnTo>
+                  <a:pt x="0" y="34805"/>
+                </a:lnTo>
+                <a:lnTo>
+                  <a:pt x="0" y="61730"/>
+                </a:lnTo>
+                <a:lnTo>
+                  <a:pt x="0" y="95222"/>
+                </a:lnTo>
+                <a:lnTo>
+                  <a:pt x="0" y="134625"/>
+                </a:lnTo>
+                <a:lnTo>
+                  <a:pt x="0" y="179937"/>
+                </a:lnTo>
+                <a:lnTo>
+                  <a:pt x="0" y="229847"/>
+                </a:lnTo>
+                <a:lnTo>
+                  <a:pt x="0" y="283697"/>
+                </a:lnTo>
+                <a:lnTo>
+                  <a:pt x="0" y="340830"/>
+                </a:lnTo>
+                <a:lnTo>
+                  <a:pt x="0" y="399934"/>
+                </a:lnTo>
+                <a:lnTo>
+                  <a:pt x="0" y="459694"/>
+                </a:lnTo>
+                <a:lnTo>
+                  <a:pt x="0" y="519454"/>
+                </a:lnTo>
+                <a:lnTo>
+                  <a:pt x="0" y="578558"/>
+                </a:lnTo>
+                <a:lnTo>
+                  <a:pt x="0" y="635691"/>
+                </a:lnTo>
+                <a:lnTo>
+                  <a:pt x="0" y="689541"/>
+                </a:lnTo>
+                <a:lnTo>
+                  <a:pt x="0" y="739450"/>
+                </a:lnTo>
+                <a:lnTo>
+                  <a:pt x="0" y="784763"/>
+                </a:lnTo>
+                <a:lnTo>
+                  <a:pt x="0" y="824165"/>
+                </a:lnTo>
+                <a:lnTo>
+                  <a:pt x="0" y="857657"/>
+                </a:lnTo>
+                <a:lnTo>
+                  <a:pt x="0" y="884582"/>
+                </a:lnTo>
+                <a:lnTo>
+                  <a:pt x="0" y="903627"/>
+                </a:lnTo>
+                <a:lnTo>
+                  <a:pt x="0" y="915447"/>
+                </a:lnTo>
+                <a:lnTo>
+                  <a:pt x="0" y="919388"/>
                 </a:lnTo>
                 <a:close/>
               </a:path>
@@ -16413,14 +16146,14 @@
       </p:sp>
       <p:sp>
         <p:nvSpPr>
-          <p:cNvPr id="19" name="S09-mark140"/>
+          <p:cNvPr id="13" name="S09-mark134"/>
           <p:cNvSpPr/>
           <p:nvPr/>
         </p:nvSpPr>
         <p:spPr>
           <a:xfrm>
-            <a:off x="7965445" y="2352804"/>
-            <a:ext cx="415771" cy="415771"/>
+            <a:off x="8918309" y="2927743"/>
+            <a:ext cx="919388" cy="919388"/>
           </a:xfrm>
           <a:prstGeom prst="ellipse">
             <a:avLst/>
@@ -16436,14 +16169,14 @@
       </p:sp>
       <p:sp>
         <p:nvSpPr>
-          <p:cNvPr id="20" name="S09-mark141"/>
+          <p:cNvPr id="14" name="S09-mark135"/>
           <p:cNvSpPr/>
           <p:nvPr/>
         </p:nvSpPr>
         <p:spPr>
           <a:xfrm>
-            <a:off x="5886591" y="1604417"/>
-            <a:ext cx="415771" cy="415771"/>
+            <a:off x="5634782" y="1745673"/>
+            <a:ext cx="919388" cy="919388"/>
           </a:xfrm>
           <a:prstGeom prst="ellipse">
             <a:avLst/>
@@ -16459,14 +16192,14 @@
       </p:sp>
       <p:sp>
         <p:nvSpPr>
-          <p:cNvPr id="21" name="S09-mark142"/>
+          <p:cNvPr id="15" name="S09-mark136"/>
           <p:cNvSpPr/>
           <p:nvPr/>
         </p:nvSpPr>
         <p:spPr>
           <a:xfrm>
-            <a:off x="3807736" y="2435959"/>
-            <a:ext cx="415771" cy="415771"/>
+            <a:off x="2351255" y="3059084"/>
+            <a:ext cx="919388" cy="919388"/>
           </a:xfrm>
           <a:prstGeom prst="ellipse">
             <a:avLst/>
@@ -16482,14 +16215,14 @@
       </p:sp>
       <p:sp>
         <p:nvSpPr>
-          <p:cNvPr id="22" name="S09-mark143"/>
+          <p:cNvPr id="16" name="S09-mark137"/>
           <p:cNvSpPr/>
           <p:nvPr/>
         </p:nvSpPr>
         <p:spPr>
           <a:xfrm>
-            <a:off x="3184080" y="3142769"/>
-            <a:ext cx="5820792" cy="0"/>
+            <a:off x="1497538" y="4372495"/>
+            <a:ext cx="9193876" cy="0"/>
           </a:xfrm>
           <a:prstGeom prst="line">
             <a:avLst/>
@@ -16505,14 +16238,14 @@
       </p:sp>
       <p:sp>
         <p:nvSpPr>
-          <p:cNvPr id="23" name="S09-mark144"/>
+          <p:cNvPr id="17" name="S09-mark138"/>
           <p:cNvSpPr/>
           <p:nvPr/>
         </p:nvSpPr>
         <p:spPr>
           <a:xfrm flipV="1">
-            <a:off x="5262934" y="2955672"/>
-            <a:ext cx="0" cy="187097"/>
+            <a:off x="4781065" y="4076977"/>
+            <a:ext cx="0" cy="295517"/>
           </a:xfrm>
           <a:prstGeom prst="line">
             <a:avLst/>
@@ -16528,14 +16261,14 @@
       </p:sp>
       <p:sp>
         <p:nvSpPr>
-          <p:cNvPr id="24" name="S09-mark145"/>
+          <p:cNvPr id="18" name="S09-mark139"/>
           <p:cNvSpPr/>
           <p:nvPr/>
         </p:nvSpPr>
         <p:spPr>
           <a:xfrm flipH="1" flipV="1">
-            <a:off x="6406304" y="1874668"/>
-            <a:ext cx="1517564" cy="540502"/>
+            <a:off x="6685511" y="2336708"/>
+            <a:ext cx="2167128" cy="755211"/>
           </a:xfrm>
           <a:prstGeom prst="line">
             <a:avLst/>
@@ -16552,14 +16285,14 @@
       </p:sp>
       <p:sp>
         <p:nvSpPr>
-          <p:cNvPr id="25" name="S09-mark146"/>
+          <p:cNvPr id="19" name="S09-mark140"/>
           <p:cNvSpPr/>
           <p:nvPr/>
         </p:nvSpPr>
         <p:spPr>
           <a:xfrm flipH="1">
-            <a:off x="4265084" y="1874668"/>
-            <a:ext cx="1517564" cy="602868"/>
+            <a:off x="3336313" y="2336708"/>
+            <a:ext cx="2167128" cy="886552"/>
           </a:xfrm>
           <a:prstGeom prst="line">
             <a:avLst/>
@@ -16576,13 +16309,13 @@
       </p:sp>
       <p:sp>
         <p:nvSpPr>
-          <p:cNvPr id="26" name="S09-label148"/>
+          <p:cNvPr id="20" name="S09-label142"/>
           <p:cNvSpPr txBox="1"/>
           <p:nvPr/>
         </p:nvSpPr>
         <p:spPr>
           <a:xfrm>
-            <a:off x="3395635" y="3160155"/>
+            <a:off x="1950027" y="4510347"/>
             <a:ext cx="408432" cy="381000"/>
           </a:xfrm>
           <a:prstGeom prst="rect">
@@ -16615,13 +16348,13 @@
       </p:sp>
       <p:sp>
         <p:nvSpPr>
-          <p:cNvPr id="27" name="S09-label150"/>
+          <p:cNvPr id="21" name="S09-label144"/>
           <p:cNvSpPr txBox="1"/>
           <p:nvPr/>
         </p:nvSpPr>
         <p:spPr>
           <a:xfrm>
-            <a:off x="5890260" y="3160155"/>
+            <a:off x="5890260" y="4510347"/>
             <a:ext cx="408432" cy="381000"/>
           </a:xfrm>
           <a:prstGeom prst="rect">
@@ -16654,13 +16387,13 @@
       </p:sp>
       <p:sp>
         <p:nvSpPr>
-          <p:cNvPr id="28" name="S09-label152"/>
+          <p:cNvPr id="22" name="S09-label146"/>
           <p:cNvSpPr txBox="1"/>
           <p:nvPr/>
         </p:nvSpPr>
         <p:spPr>
           <a:xfrm>
-            <a:off x="8384885" y="3160155"/>
+            <a:off x="9830493" y="4510347"/>
             <a:ext cx="408432" cy="381000"/>
           </a:xfrm>
           <a:prstGeom prst="rect">
@@ -16693,13 +16426,13 @@
       </p:sp>
       <p:sp>
         <p:nvSpPr>
-          <p:cNvPr id="29" name="S09-label154"/>
+          <p:cNvPr id="23" name="S09-label148"/>
           <p:cNvSpPr txBox="1"/>
           <p:nvPr/>
         </p:nvSpPr>
         <p:spPr>
           <a:xfrm>
-            <a:off x="7647931" y="2014895"/>
+            <a:off x="8852604" y="2448577"/>
             <a:ext cx="1050798" cy="301625"/>
           </a:xfrm>
           <a:prstGeom prst="rect">
@@ -16732,7 +16465,7 @@
       </p:sp>
       <p:sp>
         <p:nvSpPr>
-          <p:cNvPr id="30" name="S09-label156"/>
+          <p:cNvPr id="24" name="S09-label150"/>
           <p:cNvSpPr txBox="1"/>
           <p:nvPr/>
         </p:nvSpPr>
@@ -16771,13 +16504,13 @@
       </p:sp>
       <p:sp>
         <p:nvSpPr>
-          <p:cNvPr id="31" name="S09-label158"/>
+          <p:cNvPr id="25" name="S09-label152"/>
           <p:cNvSpPr txBox="1"/>
           <p:nvPr/>
         </p:nvSpPr>
         <p:spPr>
           <a:xfrm>
-            <a:off x="3410594" y="2098049"/>
+            <a:off x="2205921" y="2579918"/>
             <a:ext cx="1210056" cy="301625"/>
           </a:xfrm>
           <a:prstGeom prst="rect">

--- a/dist/초4/과학/땅과밤하늘/초4_과학_땅과밤하늘_02_달의모양변화.pptx
+++ b/dist/초4/과학/땅과밤하늘/초4_과학_땅과밤하늘_02_달의모양변화.pptx
@@ -122,20 +122,20 @@
   <p:extLst>
     <p:ext uri="{521415D9-36F7-43E2-AB2F-B90AF26B5E84}">
       <p14:sectionLst xmlns:p14="http://schemas.microsoft.com/office/powerpoint/2010/main">
-        <p14:section name="도입" id="{879e5bb1-24d4-9900-ab1f-e100425ccf23}">
+        <p14:section name="도입" id="{f61e89b6-c7d7-1fb1-a16c-84fd9e5c1ea8}">
           <p14:sldIdLst>
             <p14:sldId id="256"/>
             <p14:sldId id="257"/>
           </p14:sldIdLst>
         </p14:section>
-        <p14:section name="개념" id="{edc888a0-0a61-8913-47b8-670bdf2d9518}">
+        <p14:section name="개념" id="{7fa8662c-c480-fdf1-dfa7-79bfb61a354c}">
           <p14:sldIdLst>
             <p14:sldId id="258"/>
             <p14:sldId id="262"/>
             <p14:sldId id="264"/>
           </p14:sldIdLst>
         </p14:section>
-        <p14:section name="연습" id="{f8effac6-410a-b62b-4162-ba951730d4f6}">
+        <p14:section name="연습" id="{25e2f601-4fe3-b7db-eab7-1758ddd7595f}">
           <p14:sldIdLst>
             <p14:sldId id="259"/>
             <p14:sldId id="260"/>
@@ -145,31 +145,31 @@
             <p14:sldId id="266"/>
           </p14:sldIdLst>
         </p14:section>
-        <p14:section name="개념" id="{b20e53eb-21e3-ffea-1aa9-a3b420c9cb94}">
+        <p14:section name="개념" id="{80866998-5f9a-b721-33d2-adf87764341b}">
           <p14:sldIdLst/>
         </p14:section>
-        <p14:section name="연습" id="{93a6bfc6-6d60-847f-a648-db9eb4aaee28}">
+        <p14:section name="연습" id="{9e376912-ab8d-0623-67b0-7c03c2bedf06}">
           <p14:sldIdLst/>
         </p14:section>
-        <p14:section name="개념" id="{61eeeee1-5e3b-0d0e-02f0-eabe26f0eb46}">
+        <p14:section name="개념" id="{dd3427f6-51dc-a95f-bdcb-c24b1ac76c58}">
           <p14:sldIdLst/>
         </p14:section>
-        <p14:section name="연습" id="{c8405710-fbc5-d8f9-6bb1-31121969dfc9}">
+        <p14:section name="연습" id="{e3af8e61-9c5e-6220-0bf5-ae7ef7ce79cb}">
           <p14:sldIdLst/>
         </p14:section>
-        <p14:section name="확인" id="{21207875-7974-9d21-57ec-e7cec1e875f6}">
+        <p14:section name="확인" id="{9fdb1052-f6c8-b492-c4de-44d726379a77}">
           <p14:sldIdLst>
             <p14:sldId id="267"/>
             <p14:sldId id="268"/>
             <p14:sldId id="269"/>
           </p14:sldIdLst>
         </p14:section>
-        <p14:section name="정리" id="{9c09921f-09b7-4ea6-9e9c-d25034fb71fa}">
+        <p14:section name="정리" id="{1d400c78-5189-eddf-30d8-6e581c48d384}">
           <p14:sldIdLst>
             <p14:sldId id="270"/>
           </p14:sldIdLst>
         </p14:section>
-        <p14:section name="보충" id="{662d5a4d-b9fa-9667-e57b-d3051c86b5c6}">
+        <p14:section name="보충" id="{407a9d92-5e35-3910-bc3d-523457e8467d}">
           <p14:sldIdLst>
             <p14:sldId id="271"/>
           </p14:sldIdLst>
